--- a/output/wordlabs-viv-3day.pptx
+++ b/output/wordlabs-viv-3day.pptx
@@ -5622,7 +5622,7 @@
                 <a:ea typeface="Trebuchet MS" pitchFamily="34" charset="-122"/>
                 <a:cs typeface="Trebuchet MS" pitchFamily="34" charset="-120"/>
               </a:rPr>
-              <a:t>1</a:t>
+              <a:t>0</a:t>
             </a:r>
             <a:pPr algn="ctr" indent="0" marL="0">
               <a:buNone/>
@@ -6071,7 +6071,7 @@
                 <a:ea typeface="Calibri" pitchFamily="34" charset="-122"/>
                 <a:cs typeface="Calibri" pitchFamily="34" charset="-120"/>
               </a:rPr>
-              <a:t> painting seemed to </a:t>
+              <a:t> colours of the coral reef helped the injured fish </a:t>
             </a:r>
             <a:pPr algn="l" indent="0" marL="0">
               <a:buNone/>
@@ -6088,7 +6088,7 @@
                 <a:ea typeface="Calibri" pitchFamily="34" charset="-122"/>
                 <a:cs typeface="Calibri" pitchFamily="34" charset="-120"/>
               </a:rPr>
-              <a:t>revive</a:t>
+              <a:t>survive</a:t>
             </a:r>
             <a:pPr algn="l" indent="0" marL="0">
               <a:buNone/>
@@ -6102,7 +6102,7 @@
                 <a:ea typeface="Calibri" pitchFamily="34" charset="-122"/>
                 <a:cs typeface="Calibri" pitchFamily="34" charset="-120"/>
               </a:rPr>
-              <a:t> everyone's excitement about the school art show.</a:t>
+              <a:t> in its natural habitat.</a:t>
             </a:r>
             <a:endParaRPr lang="en-US" sz="1800" dirty="0"/>
           </a:p>
@@ -6385,7 +6385,7 @@
                 <a:ea typeface="Trebuchet MS" pitchFamily="34" charset="-122"/>
                 <a:cs typeface="Trebuchet MS" pitchFamily="34" charset="-120"/>
               </a:rPr>
-              <a:t>revive</a:t>
+              <a:t>survive</a:t>
             </a:r>
             <a:endParaRPr lang="en-US" sz="1400" dirty="0"/>
           </a:p>
@@ -11192,7 +11192,7 @@
                 <a:ea typeface="Trebuchet MS" pitchFamily="34" charset="-122"/>
                 <a:cs typeface="Trebuchet MS" pitchFamily="34" charset="-120"/>
               </a:rPr>
-              <a:t>revive</a:t>
+              <a:t>survive</a:t>
             </a:r>
             <a:endParaRPr lang="en-US" sz="2800" dirty="0"/>
           </a:p>
@@ -12019,7 +12019,7 @@
                 <a:ea typeface="Trebuchet MS" pitchFamily="34" charset="-122"/>
                 <a:cs typeface="Trebuchet MS" pitchFamily="34" charset="-120"/>
               </a:rPr>
-              <a:t>revive</a:t>
+              <a:t>survive</a:t>
             </a:r>
             <a:endParaRPr lang="en-US" sz="2800" dirty="0"/>
           </a:p>
@@ -12158,7 +12158,7 @@
                 <a:ea typeface="Trebuchet MS" pitchFamily="34" charset="-122"/>
                 <a:cs typeface="Trebuchet MS" pitchFamily="34" charset="-120"/>
               </a:rPr>
-              <a:t>re</a:t>
+              <a:t>sur</a:t>
             </a:r>
             <a:endParaRPr lang="en-US" sz="1300" dirty="0"/>
           </a:p>
@@ -12197,7 +12197,7 @@
                 <a:ea typeface="Calibri" pitchFamily="34" charset="-122"/>
                 <a:cs typeface="Calibri" pitchFamily="34" charset="-120"/>
               </a:rPr>
-              <a:t>again</a:t>
+              <a:t>over, above, beyond</a:t>
             </a:r>
             <a:endParaRPr lang="en-US" sz="850" dirty="0"/>
           </a:p>
@@ -13116,7 +13116,7 @@
                 <a:ea typeface="Trebuchet MS" pitchFamily="34" charset="-122"/>
                 <a:cs typeface="Trebuchet MS" pitchFamily="34" charset="-120"/>
               </a:rPr>
-              <a:t>revive</a:t>
+              <a:t>survive</a:t>
             </a:r>
             <a:endParaRPr lang="en-US" sz="2800" dirty="0"/>
           </a:p>
@@ -13255,7 +13255,7 @@
                 <a:ea typeface="Trebuchet MS" pitchFamily="34" charset="-122"/>
                 <a:cs typeface="Trebuchet MS" pitchFamily="34" charset="-120"/>
               </a:rPr>
-              <a:t>re</a:t>
+              <a:t>sur</a:t>
             </a:r>
             <a:endParaRPr lang="en-US" sz="1300" dirty="0"/>
           </a:p>
@@ -13294,7 +13294,7 @@
                 <a:ea typeface="Calibri" pitchFamily="34" charset="-122"/>
                 <a:cs typeface="Calibri" pitchFamily="34" charset="-120"/>
               </a:rPr>
-              <a:t>again</a:t>
+              <a:t>over, above, beyond</a:t>
             </a:r>
             <a:endParaRPr lang="en-US" sz="850" dirty="0"/>
           </a:p>
@@ -13677,7 +13677,7 @@
                 <a:ea typeface="Trebuchet MS" pitchFamily="34" charset="-122"/>
                 <a:cs typeface="Trebuchet MS" pitchFamily="34" charset="-120"/>
               </a:rPr>
-              <a:t>re</a:t>
+              <a:t>sur</a:t>
             </a:r>
             <a:endParaRPr lang="en-US" sz="1400" dirty="0"/>
           </a:p>
@@ -14610,7 +14610,7 @@
                 <a:ea typeface="Trebuchet MS" pitchFamily="34" charset="-122"/>
                 <a:cs typeface="Trebuchet MS" pitchFamily="34" charset="-120"/>
               </a:rPr>
-              <a:t>revive</a:t>
+              <a:t>survive</a:t>
             </a:r>
             <a:endParaRPr lang="en-US" sz="2800" dirty="0"/>
           </a:p>
@@ -14749,7 +14749,7 @@
                 <a:ea typeface="Trebuchet MS" pitchFamily="34" charset="-122"/>
                 <a:cs typeface="Trebuchet MS" pitchFamily="34" charset="-120"/>
               </a:rPr>
-              <a:t>re</a:t>
+              <a:t>sur</a:t>
             </a:r>
             <a:endParaRPr lang="en-US" sz="1300" dirty="0"/>
           </a:p>
@@ -14788,7 +14788,7 @@
                 <a:ea typeface="Calibri" pitchFamily="34" charset="-122"/>
                 <a:cs typeface="Calibri" pitchFamily="34" charset="-120"/>
               </a:rPr>
-              <a:t>again</a:t>
+              <a:t>over, above, beyond</a:t>
             </a:r>
             <a:endParaRPr lang="en-US" sz="850" dirty="0"/>
           </a:p>
@@ -15171,7 +15171,7 @@
                 <a:ea typeface="Trebuchet MS" pitchFamily="34" charset="-122"/>
                 <a:cs typeface="Trebuchet MS" pitchFamily="34" charset="-120"/>
               </a:rPr>
-              <a:t>re</a:t>
+              <a:t>sur</a:t>
             </a:r>
             <a:endParaRPr lang="en-US" sz="1400" dirty="0"/>
           </a:p>
@@ -15383,7 +15383,7 @@
         </p:nvSpPr>
         <p:spPr>
           <a:xfrm>
-            <a:off x="2254649" y="4169664"/>
+            <a:off x="2427732" y="4169664"/>
             <a:ext cx="685800" cy="475488"/>
           </a:xfrm>
           <a:prstGeom prst="rect">
@@ -15410,7 +15410,7 @@
         </p:nvSpPr>
         <p:spPr>
           <a:xfrm>
-            <a:off x="2254649" y="4169664"/>
+            <a:off x="2427732" y="4169664"/>
             <a:ext cx="685800" cy="475488"/>
           </a:xfrm>
           <a:prstGeom prst="rect">
@@ -15435,7 +15435,7 @@
                 <a:ea typeface="Trebuchet MS" pitchFamily="34" charset="-122"/>
                 <a:cs typeface="Trebuchet MS" pitchFamily="34" charset="-120"/>
               </a:rPr>
-              <a:t>r</a:t>
+              <a:t>s</a:t>
             </a:r>
             <a:endParaRPr lang="en-US" sz="900" dirty="0"/>
           </a:p>
@@ -15449,7 +15449,7 @@
         </p:nvSpPr>
         <p:spPr>
           <a:xfrm>
-            <a:off x="3293146" y="4169664"/>
+            <a:off x="3639312" y="4169664"/>
             <a:ext cx="685800" cy="475488"/>
           </a:xfrm>
           <a:prstGeom prst="rect">
@@ -15476,7 +15476,7 @@
         </p:nvSpPr>
         <p:spPr>
           <a:xfrm>
-            <a:off x="3293146" y="4169664"/>
+            <a:off x="3639312" y="4169664"/>
             <a:ext cx="685800" cy="475488"/>
           </a:xfrm>
           <a:prstGeom prst="rect">
@@ -15501,7 +15501,7 @@
                 <a:ea typeface="Trebuchet MS" pitchFamily="34" charset="-122"/>
                 <a:cs typeface="Trebuchet MS" pitchFamily="34" charset="-120"/>
               </a:rPr>
-              <a:t>e</a:t>
+              <a:t>ur</a:t>
             </a:r>
             <a:endParaRPr lang="en-US" sz="900" dirty="0"/>
           </a:p>
@@ -15515,7 +15515,7 @@
         </p:nvSpPr>
         <p:spPr>
           <a:xfrm>
-            <a:off x="4331643" y="4169664"/>
+            <a:off x="4850892" y="4169664"/>
             <a:ext cx="685800" cy="475488"/>
           </a:xfrm>
           <a:prstGeom prst="rect">
@@ -15542,7 +15542,7 @@
         </p:nvSpPr>
         <p:spPr>
           <a:xfrm>
-            <a:off x="4331643" y="4169664"/>
+            <a:off x="4850892" y="4169664"/>
             <a:ext cx="685800" cy="475488"/>
           </a:xfrm>
           <a:prstGeom prst="rect">
@@ -15581,7 +15581,7 @@
         </p:nvSpPr>
         <p:spPr>
           <a:xfrm>
-            <a:off x="5370141" y="4169664"/>
+            <a:off x="6062472" y="4169664"/>
             <a:ext cx="685800" cy="475488"/>
           </a:xfrm>
           <a:prstGeom prst="rect">
@@ -15608,7 +15608,7 @@
         </p:nvSpPr>
         <p:spPr>
           <a:xfrm>
-            <a:off x="5370141" y="4169664"/>
+            <a:off x="6062472" y="4169664"/>
             <a:ext cx="685800" cy="475488"/>
           </a:xfrm>
           <a:prstGeom prst="rect">
@@ -15647,7 +15647,7 @@
         </p:nvSpPr>
         <p:spPr>
           <a:xfrm>
-            <a:off x="6408638" y="4169664"/>
+            <a:off x="7274052" y="4169664"/>
             <a:ext cx="685800" cy="475488"/>
           </a:xfrm>
           <a:prstGeom prst="rect">
@@ -15674,7 +15674,7 @@
         </p:nvSpPr>
         <p:spPr>
           <a:xfrm>
-            <a:off x="6408638" y="4169664"/>
+            <a:off x="7274052" y="4169664"/>
             <a:ext cx="685800" cy="475488"/>
           </a:xfrm>
           <a:prstGeom prst="rect">
@@ -15699,73 +15699,7 @@
                 <a:ea typeface="Trebuchet MS" pitchFamily="34" charset="-122"/>
                 <a:cs typeface="Trebuchet MS" pitchFamily="34" charset="-120"/>
               </a:rPr>
-              <a:t>v</a:t>
-            </a:r>
-            <a:endParaRPr lang="en-US" sz="900" dirty="0"/>
-          </a:p>
-        </p:txBody>
-      </p:sp>
-      <p:sp>
-        <p:nvSpPr>
-          <p:cNvPr id="46" name="Shape 44"/>
-          <p:cNvSpPr/>
-          <p:nvPr/>
-        </p:nvSpPr>
-        <p:spPr>
-          <a:xfrm>
-            <a:off x="7447135" y="4169664"/>
-            <a:ext cx="685800" cy="475488"/>
-          </a:xfrm>
-          <a:prstGeom prst="rect">
-            <a:avLst>
-              <a:gd name="adj" fmla="val 7692"/>
-            </a:avLst>
-          </a:prstGeom>
-          <a:solidFill>
-            <a:srgbClr val="FFFFFF"/>
-          </a:solidFill>
-          <a:ln w="12700">
-            <a:solidFill>
-              <a:srgbClr val="DB2777"/>
-            </a:solidFill>
-            <a:prstDash val="solid"/>
-          </a:ln>
-        </p:spPr>
-      </p:sp>
-      <p:sp>
-        <p:nvSpPr>
-          <p:cNvPr id="47" name="Text 45"/>
-          <p:cNvSpPr/>
-          <p:nvPr/>
-        </p:nvSpPr>
-        <p:spPr>
-          <a:xfrm>
-            <a:off x="7447135" y="4169664"/>
-            <a:ext cx="685800" cy="475488"/>
-          </a:xfrm>
-          <a:prstGeom prst="rect">
-            <a:avLst/>
-          </a:prstGeom>
-          <a:noFill/>
-          <a:ln/>
-        </p:spPr>
-        <p:txBody>
-          <a:bodyPr wrap="square" lIns="0" tIns="0" rIns="0" bIns="0" rtlCol="0" anchor="ctr"/>
-          <a:lstStyle/>
-          <a:p>
-            <a:pPr algn="ctr" indent="0" marL="0">
-              <a:buNone/>
-            </a:pPr>
-            <a:r>
-              <a:rPr lang="en-US" sz="900" b="1" dirty="0">
-                <a:solidFill>
-                  <a:srgbClr val="9D174D"/>
-                </a:solidFill>
-                <a:latin typeface="Trebuchet MS" pitchFamily="34" charset="0"/>
-                <a:ea typeface="Trebuchet MS" pitchFamily="34" charset="-122"/>
-                <a:cs typeface="Trebuchet MS" pitchFamily="34" charset="-120"/>
-              </a:rPr>
-              <a:t>e</a:t>
+              <a:t>ve</a:t>
             </a:r>
             <a:endParaRPr lang="en-US" sz="900" dirty="0"/>
           </a:p>
@@ -17091,7 +17025,7 @@
                 <a:ea typeface="Calibri" pitchFamily="34" charset="-122"/>
                 <a:cs typeface="Calibri" pitchFamily="34" charset="-120"/>
               </a:rPr>
-              <a:t>Her </a:t>
+              <a:t>The </a:t>
             </a:r>
             <a:pPr algn="l" indent="0" marL="0">
               <a:buNone/>
@@ -17122,7 +17056,7 @@
                 <a:ea typeface="Calibri" pitchFamily="34" charset="-122"/>
                 <a:cs typeface="Calibri" pitchFamily="34" charset="-120"/>
               </a:rPr>
-              <a:t> personality helped </a:t>
+              <a:t> presenter helped </a:t>
             </a:r>
             <a:pPr algn="l" indent="0" marL="0">
               <a:buNone/>
@@ -17153,38 +17087,7 @@
                 <a:ea typeface="Calibri" pitchFamily="34" charset="-122"/>
                 <a:cs typeface="Calibri" pitchFamily="34" charset="-120"/>
               </a:rPr>
-              <a:t> the </a:t>
-            </a:r>
-            <a:pPr algn="l" indent="0" marL="0">
-              <a:buNone/>
-            </a:pPr>
-            <a:r>
-              <a:rPr lang="en-US" sz="1800" b="1" dirty="0">
-                <a:solidFill>
-                  <a:srgbClr val="0D9488"/>
-                </a:solidFill>
-                <a:highlight>
-                  <a:srgbClr val="CCFBF1"/>
-                </a:highlight>
-                <a:latin typeface="Calibri" pitchFamily="34" charset="0"/>
-                <a:ea typeface="Calibri" pitchFamily="34" charset="-122"/>
-                <a:cs typeface="Calibri" pitchFamily="34" charset="-120"/>
-              </a:rPr>
-              <a:t>convivial</a:t>
-            </a:r>
-            <a:pPr algn="l" indent="0" marL="0">
-              <a:buNone/>
-            </a:pPr>
-            <a:r>
-              <a:rPr lang="en-US" sz="1800" dirty="0">
-                <a:solidFill>
-                  <a:srgbClr val="0F172A"/>
-                </a:solidFill>
-                <a:latin typeface="Calibri" pitchFamily="34" charset="0"/>
-                <a:ea typeface="Calibri" pitchFamily="34" charset="-122"/>
-                <a:cs typeface="Calibri" pitchFamily="34" charset="-120"/>
-              </a:rPr>
-              <a:t> spirit of the group after a tough week.</a:t>
+              <a:t> the audience's interest; everyone left feeling full of energy.</a:t>
             </a:r>
             <a:endParaRPr lang="en-US" sz="1800" dirty="0"/>
           </a:p>
@@ -19182,7 +19085,7 @@
                 <a:ea typeface="Calibri" pitchFamily="34" charset="-122"/>
                 <a:cs typeface="Calibri" pitchFamily="34" charset="-120"/>
               </a:rPr>
-              <a:t>having a tendency toward</a:t>
+              <a:t>relating to</a:t>
             </a:r>
             <a:endParaRPr lang="en-US" sz="850" dirty="0"/>
           </a:p>
@@ -19294,7 +19197,7 @@
                 <a:ea typeface="Calibri" pitchFamily="34" charset="-122"/>
                 <a:cs typeface="Calibri" pitchFamily="34" charset="-120"/>
               </a:rPr>
-              <a:t>full of</a:t>
+              <a:t>full of, having the quality of</a:t>
             </a:r>
             <a:endParaRPr lang="en-US" sz="850" dirty="0"/>
           </a:p>
@@ -19302,57 +19205,150 @@
       </p:sp>
       <p:sp>
         <p:nvSpPr>
-          <p:cNvPr id="25" name="Text 23"/>
-          <p:cNvSpPr/>
-          <p:nvPr/>
-        </p:nvSpPr>
-        <p:spPr>
-          <a:xfrm>
-            <a:off x="6519672" y="2752344"/>
-            <a:ext cx="1828800" cy="182880"/>
-          </a:xfrm>
-          <a:prstGeom prst="rect">
-            <a:avLst/>
-          </a:prstGeom>
-          <a:noFill/>
-          <a:ln/>
-        </p:spPr>
-        <p:txBody>
-          <a:bodyPr wrap="square" lIns="0" tIns="0" rIns="0" bIns="0" rtlCol="0" anchor="t"/>
-          <a:lstStyle/>
-          <a:p>
-            <a:pPr algn="ctr" indent="0" marL="0">
-              <a:buNone/>
-            </a:pPr>
-            <a:r>
-              <a:rPr lang="en-US" sz="700" i="1" dirty="0">
-                <a:solidFill>
-                  <a:srgbClr val="94A3B8"/>
+          <p:cNvPr id="25" name="Shape 23"/>
+          <p:cNvSpPr/>
+          <p:nvPr/>
+        </p:nvSpPr>
+        <p:spPr>
+          <a:xfrm>
+            <a:off x="365760" y="3273552"/>
+            <a:ext cx="1371600" cy="658368"/>
+          </a:xfrm>
+          <a:prstGeom prst="rect">
+            <a:avLst>
+              <a:gd name="adj" fmla="val 8333"/>
+            </a:avLst>
+          </a:prstGeom>
+          <a:solidFill>
+            <a:srgbClr val="E2E8F0"/>
+          </a:solidFill>
+          <a:ln w="12700">
+            <a:solidFill>
+              <a:srgbClr val="E2E8F0"/>
+            </a:solidFill>
+            <a:prstDash val="solid"/>
+          </a:ln>
+        </p:spPr>
+      </p:sp>
+      <p:sp>
+        <p:nvSpPr>
+          <p:cNvPr id="26" name="Text 24"/>
+          <p:cNvSpPr/>
+          <p:nvPr/>
+        </p:nvSpPr>
+        <p:spPr>
+          <a:xfrm>
+            <a:off x="365760" y="3273552"/>
+            <a:ext cx="1371600" cy="658368"/>
+          </a:xfrm>
+          <a:prstGeom prst="rect">
+            <a:avLst/>
+          </a:prstGeom>
+          <a:noFill/>
+          <a:ln/>
+        </p:spPr>
+        <p:txBody>
+          <a:bodyPr wrap="square" lIns="0" tIns="0" rIns="0" bIns="0" rtlCol="0" anchor="ctr"/>
+          <a:lstStyle/>
+          <a:p>
+            <a:pPr algn="ctr" indent="0" marL="0">
+              <a:buNone/>
+            </a:pPr>
+            <a:r>
+              <a:rPr lang="en-US" sz="1100" b="1" dirty="0">
+                <a:solidFill>
+                  <a:srgbClr val="475569"/>
+                </a:solidFill>
+                <a:latin typeface="Trebuchet MS" pitchFamily="34" charset="0"/>
+                <a:ea typeface="Trebuchet MS" pitchFamily="34" charset="-122"/>
+                <a:cs typeface="Trebuchet MS" pitchFamily="34" charset="-120"/>
+              </a:rPr>
+              <a:t>Syllables</a:t>
+            </a:r>
+            <a:endParaRPr lang="en-US" sz="1100" dirty="0"/>
+          </a:p>
+        </p:txBody>
+      </p:sp>
+      <p:sp>
+        <p:nvSpPr>
+          <p:cNvPr id="27" name="Shape 25"/>
+          <p:cNvSpPr/>
+          <p:nvPr/>
+        </p:nvSpPr>
+        <p:spPr>
+          <a:xfrm>
+            <a:off x="1874520" y="3273552"/>
+            <a:ext cx="6903720" cy="658368"/>
+          </a:xfrm>
+          <a:prstGeom prst="rect">
+            <a:avLst>
+              <a:gd name="adj" fmla="val 8333"/>
+            </a:avLst>
+          </a:prstGeom>
+          <a:solidFill>
+            <a:srgbClr val="F8FAFC"/>
+          </a:solidFill>
+          <a:ln w="12700">
+            <a:solidFill>
+              <a:srgbClr val="E2E8F0"/>
+            </a:solidFill>
+            <a:prstDash val="dash"/>
+          </a:ln>
+        </p:spPr>
+      </p:sp>
+      <p:sp>
+        <p:nvSpPr>
+          <p:cNvPr id="28" name="Text 26"/>
+          <p:cNvSpPr/>
+          <p:nvPr/>
+        </p:nvSpPr>
+        <p:spPr>
+          <a:xfrm>
+            <a:off x="1874520" y="3273552"/>
+            <a:ext cx="6903720" cy="658368"/>
+          </a:xfrm>
+          <a:prstGeom prst="rect">
+            <a:avLst/>
+          </a:prstGeom>
+          <a:noFill/>
+          <a:ln/>
+        </p:spPr>
+        <p:txBody>
+          <a:bodyPr wrap="square" rtlCol="0" anchor="ctr"/>
+          <a:lstStyle/>
+          <a:p>
+            <a:pPr algn="ctr" indent="0" marL="0">
+              <a:buNone/>
+            </a:pPr>
+            <a:r>
+              <a:rPr lang="en-US" sz="1100" i="1" dirty="0">
+                <a:solidFill>
+                  <a:srgbClr val="CBD5E1"/>
                 </a:solidFill>
                 <a:latin typeface="Calibri" pitchFamily="34" charset="0"/>
                 <a:ea typeface="Calibri" pitchFamily="34" charset="-122"/>
                 <a:cs typeface="Calibri" pitchFamily="34" charset="-120"/>
               </a:rPr>
-              <a:t>ti/ci before a vowel often makes /sh/</a:t>
-            </a:r>
-            <a:endParaRPr lang="en-US" sz="700" dirty="0"/>
-          </a:p>
-        </p:txBody>
-      </p:sp>
-      <p:sp>
-        <p:nvSpPr>
-          <p:cNvPr id="26" name="Shape 24"/>
-          <p:cNvSpPr/>
-          <p:nvPr/>
-        </p:nvSpPr>
-        <p:spPr>
-          <a:xfrm>
-            <a:off x="365760" y="3273552"/>
-            <a:ext cx="1371600" cy="658368"/>
+              <a:t>Write here...</a:t>
+            </a:r>
+            <a:endParaRPr lang="en-US" sz="1100" dirty="0"/>
+          </a:p>
+        </p:txBody>
+      </p:sp>
+      <p:sp>
+        <p:nvSpPr>
+          <p:cNvPr id="29" name="Shape 27"/>
+          <p:cNvSpPr/>
+          <p:nvPr/>
+        </p:nvSpPr>
+        <p:spPr>
+          <a:xfrm>
+            <a:off x="365760" y="4096512"/>
+            <a:ext cx="1371600" cy="804672"/>
           </a:xfrm>
           <a:prstGeom prst="rect">
             <a:avLst>
-              <a:gd name="adj" fmla="val 8333"/>
+              <a:gd name="adj" fmla="val 6818"/>
             </a:avLst>
           </a:prstGeom>
           <a:solidFill>
@@ -19368,14 +19364,14 @@
       </p:sp>
       <p:sp>
         <p:nvSpPr>
-          <p:cNvPr id="27" name="Text 25"/>
-          <p:cNvSpPr/>
-          <p:nvPr/>
-        </p:nvSpPr>
-        <p:spPr>
-          <a:xfrm>
-            <a:off x="365760" y="3273552"/>
-            <a:ext cx="1371600" cy="658368"/>
+          <p:cNvPr id="30" name="Text 28"/>
+          <p:cNvSpPr/>
+          <p:nvPr/>
+        </p:nvSpPr>
+        <p:spPr>
+          <a:xfrm>
+            <a:off x="365760" y="4096512"/>
+            <a:ext cx="1371600" cy="804672"/>
           </a:xfrm>
           <a:prstGeom prst="rect">
             <a:avLst/>
@@ -19399,7 +19395,7 @@
                 <a:ea typeface="Trebuchet MS" pitchFamily="34" charset="-122"/>
                 <a:cs typeface="Trebuchet MS" pitchFamily="34" charset="-120"/>
               </a:rPr>
-              <a:t>Syllables</a:t>
+              <a:t>Phonemes</a:t>
             </a:r>
             <a:endParaRPr lang="en-US" sz="1100" dirty="0"/>
           </a:p>
@@ -19407,80 +19403,14 @@
       </p:sp>
       <p:sp>
         <p:nvSpPr>
-          <p:cNvPr id="28" name="Shape 26"/>
-          <p:cNvSpPr/>
-          <p:nvPr/>
-        </p:nvSpPr>
-        <p:spPr>
-          <a:xfrm>
-            <a:off x="1874520" y="3273552"/>
-            <a:ext cx="6903720" cy="658368"/>
-          </a:xfrm>
-          <a:prstGeom prst="rect">
-            <a:avLst>
-              <a:gd name="adj" fmla="val 8333"/>
-            </a:avLst>
-          </a:prstGeom>
-          <a:solidFill>
-            <a:srgbClr val="F8FAFC"/>
-          </a:solidFill>
-          <a:ln w="12700">
-            <a:solidFill>
-              <a:srgbClr val="E2E8F0"/>
-            </a:solidFill>
-            <a:prstDash val="dash"/>
-          </a:ln>
-        </p:spPr>
-      </p:sp>
-      <p:sp>
-        <p:nvSpPr>
-          <p:cNvPr id="29" name="Text 27"/>
-          <p:cNvSpPr/>
-          <p:nvPr/>
-        </p:nvSpPr>
-        <p:spPr>
-          <a:xfrm>
-            <a:off x="1874520" y="3273552"/>
-            <a:ext cx="6903720" cy="658368"/>
-          </a:xfrm>
-          <a:prstGeom prst="rect">
-            <a:avLst/>
-          </a:prstGeom>
-          <a:noFill/>
-          <a:ln/>
-        </p:spPr>
-        <p:txBody>
-          <a:bodyPr wrap="square" rtlCol="0" anchor="ctr"/>
-          <a:lstStyle/>
-          <a:p>
-            <a:pPr algn="ctr" indent="0" marL="0">
-              <a:buNone/>
-            </a:pPr>
-            <a:r>
-              <a:rPr lang="en-US" sz="1100" i="1" dirty="0">
-                <a:solidFill>
-                  <a:srgbClr val="CBD5E1"/>
-                </a:solidFill>
-                <a:latin typeface="Calibri" pitchFamily="34" charset="0"/>
-                <a:ea typeface="Calibri" pitchFamily="34" charset="-122"/>
-                <a:cs typeface="Calibri" pitchFamily="34" charset="-120"/>
-              </a:rPr>
-              <a:t>Write here...</a:t>
-            </a:r>
-            <a:endParaRPr lang="en-US" sz="1100" dirty="0"/>
-          </a:p>
-        </p:txBody>
-      </p:sp>
-      <p:sp>
-        <p:nvSpPr>
-          <p:cNvPr id="30" name="Shape 28"/>
-          <p:cNvSpPr/>
-          <p:nvPr/>
-        </p:nvSpPr>
-        <p:spPr>
-          <a:xfrm>
-            <a:off x="365760" y="4096512"/>
-            <a:ext cx="1371600" cy="804672"/>
+          <p:cNvPr id="31" name="Shape 29"/>
+          <p:cNvSpPr/>
+          <p:nvPr/>
+        </p:nvSpPr>
+        <p:spPr>
+          <a:xfrm>
+            <a:off x="1874520" y="4096512"/>
+            <a:ext cx="6903720" cy="804672"/>
           </a:xfrm>
           <a:prstGeom prst="rect">
             <a:avLst>
@@ -19488,85 +19418,19 @@
             </a:avLst>
           </a:prstGeom>
           <a:solidFill>
-            <a:srgbClr val="E2E8F0"/>
+            <a:srgbClr val="F8FAFC"/>
           </a:solidFill>
           <a:ln w="12700">
             <a:solidFill>
               <a:srgbClr val="E2E8F0"/>
             </a:solidFill>
-            <a:prstDash val="solid"/>
-          </a:ln>
-        </p:spPr>
-      </p:sp>
-      <p:sp>
-        <p:nvSpPr>
-          <p:cNvPr id="31" name="Text 29"/>
-          <p:cNvSpPr/>
-          <p:nvPr/>
-        </p:nvSpPr>
-        <p:spPr>
-          <a:xfrm>
-            <a:off x="365760" y="4096512"/>
-            <a:ext cx="1371600" cy="804672"/>
-          </a:xfrm>
-          <a:prstGeom prst="rect">
-            <a:avLst/>
-          </a:prstGeom>
-          <a:noFill/>
-          <a:ln/>
-        </p:spPr>
-        <p:txBody>
-          <a:bodyPr wrap="square" lIns="0" tIns="0" rIns="0" bIns="0" rtlCol="0" anchor="ctr"/>
-          <a:lstStyle/>
-          <a:p>
-            <a:pPr algn="ctr" indent="0" marL="0">
-              <a:buNone/>
-            </a:pPr>
-            <a:r>
-              <a:rPr lang="en-US" sz="1100" b="1" dirty="0">
-                <a:solidFill>
-                  <a:srgbClr val="475569"/>
-                </a:solidFill>
-                <a:latin typeface="Trebuchet MS" pitchFamily="34" charset="0"/>
-                <a:ea typeface="Trebuchet MS" pitchFamily="34" charset="-122"/>
-                <a:cs typeface="Trebuchet MS" pitchFamily="34" charset="-120"/>
-              </a:rPr>
-              <a:t>Phonemes</a:t>
-            </a:r>
-            <a:endParaRPr lang="en-US" sz="1100" dirty="0"/>
-          </a:p>
-        </p:txBody>
-      </p:sp>
-      <p:sp>
-        <p:nvSpPr>
-          <p:cNvPr id="32" name="Shape 30"/>
-          <p:cNvSpPr/>
-          <p:nvPr/>
-        </p:nvSpPr>
-        <p:spPr>
-          <a:xfrm>
-            <a:off x="1874520" y="4096512"/>
-            <a:ext cx="6903720" cy="804672"/>
-          </a:xfrm>
-          <a:prstGeom prst="rect">
-            <a:avLst>
-              <a:gd name="adj" fmla="val 6818"/>
-            </a:avLst>
-          </a:prstGeom>
-          <a:solidFill>
-            <a:srgbClr val="F8FAFC"/>
-          </a:solidFill>
-          <a:ln w="12700">
-            <a:solidFill>
-              <a:srgbClr val="E2E8F0"/>
-            </a:solidFill>
             <a:prstDash val="dash"/>
           </a:ln>
         </p:spPr>
       </p:sp>
       <p:sp>
         <p:nvSpPr>
-          <p:cNvPr id="33" name="Text 31"/>
+          <p:cNvPr id="32" name="Text 30"/>
           <p:cNvSpPr/>
           <p:nvPr/>
         </p:nvSpPr>
@@ -20318,7 +20182,7 @@
                 <a:ea typeface="Calibri" pitchFamily="34" charset="-122"/>
                 <a:cs typeface="Calibri" pitchFamily="34" charset="-120"/>
               </a:rPr>
-              <a:t>having a tendency toward</a:t>
+              <a:t>relating to</a:t>
             </a:r>
             <a:endParaRPr lang="en-US" sz="850" dirty="0"/>
           </a:p>
@@ -20430,7 +20294,7 @@
                 <a:ea typeface="Calibri" pitchFamily="34" charset="-122"/>
                 <a:cs typeface="Calibri" pitchFamily="34" charset="-120"/>
               </a:rPr>
-              <a:t>full of</a:t>
+              <a:t>full of, having the quality of</a:t>
             </a:r>
             <a:endParaRPr lang="en-US" sz="850" dirty="0"/>
           </a:p>
@@ -20438,46 +20302,7 @@
       </p:sp>
       <p:sp>
         <p:nvSpPr>
-          <p:cNvPr id="25" name="Text 23"/>
-          <p:cNvSpPr/>
-          <p:nvPr/>
-        </p:nvSpPr>
-        <p:spPr>
-          <a:xfrm>
-            <a:off x="6519672" y="2752344"/>
-            <a:ext cx="1828800" cy="182880"/>
-          </a:xfrm>
-          <a:prstGeom prst="rect">
-            <a:avLst/>
-          </a:prstGeom>
-          <a:noFill/>
-          <a:ln/>
-        </p:spPr>
-        <p:txBody>
-          <a:bodyPr wrap="square" lIns="0" tIns="0" rIns="0" bIns="0" rtlCol="0" anchor="t"/>
-          <a:lstStyle/>
-          <a:p>
-            <a:pPr algn="ctr" indent="0" marL="0">
-              <a:buNone/>
-            </a:pPr>
-            <a:r>
-              <a:rPr lang="en-US" sz="700" i="1" dirty="0">
-                <a:solidFill>
-                  <a:srgbClr val="94A3B8"/>
-                </a:solidFill>
-                <a:latin typeface="Calibri" pitchFamily="34" charset="0"/>
-                <a:ea typeface="Calibri" pitchFamily="34" charset="-122"/>
-                <a:cs typeface="Calibri" pitchFamily="34" charset="-120"/>
-              </a:rPr>
-              <a:t>ti/ci before a vowel often makes /sh/</a:t>
-            </a:r>
-            <a:endParaRPr lang="en-US" sz="700" dirty="0"/>
-          </a:p>
-        </p:txBody>
-      </p:sp>
-      <p:sp>
-        <p:nvSpPr>
-          <p:cNvPr id="26" name="Shape 24"/>
+          <p:cNvPr id="25" name="Shape 23"/>
           <p:cNvSpPr/>
           <p:nvPr/>
         </p:nvSpPr>
@@ -20504,7 +20329,7 @@
       </p:sp>
       <p:sp>
         <p:nvSpPr>
-          <p:cNvPr id="27" name="Text 25"/>
+          <p:cNvPr id="26" name="Text 24"/>
           <p:cNvSpPr/>
           <p:nvPr/>
         </p:nvSpPr>
@@ -20543,7 +20368,7 @@
       </p:sp>
       <p:sp>
         <p:nvSpPr>
-          <p:cNvPr id="28" name="Shape 26"/>
+          <p:cNvPr id="27" name="Shape 25"/>
           <p:cNvSpPr/>
           <p:nvPr/>
         </p:nvSpPr>
@@ -20570,7 +20395,7 @@
       </p:sp>
       <p:sp>
         <p:nvSpPr>
-          <p:cNvPr id="29" name="Shape 27"/>
+          <p:cNvPr id="28" name="Shape 26"/>
           <p:cNvSpPr/>
           <p:nvPr/>
         </p:nvSpPr>
@@ -20597,7 +20422,7 @@
       </p:sp>
       <p:sp>
         <p:nvSpPr>
-          <p:cNvPr id="30" name="Text 28"/>
+          <p:cNvPr id="29" name="Text 27"/>
           <p:cNvSpPr/>
           <p:nvPr/>
         </p:nvSpPr>
@@ -20636,7 +20461,7 @@
       </p:sp>
       <p:sp>
         <p:nvSpPr>
-          <p:cNvPr id="31" name="Text 29"/>
+          <p:cNvPr id="30" name="Text 28"/>
           <p:cNvSpPr/>
           <p:nvPr/>
         </p:nvSpPr>
@@ -20675,7 +20500,7 @@
       </p:sp>
       <p:sp>
         <p:nvSpPr>
-          <p:cNvPr id="32" name="Shape 30"/>
+          <p:cNvPr id="31" name="Shape 29"/>
           <p:cNvSpPr/>
           <p:nvPr/>
         </p:nvSpPr>
@@ -20702,7 +20527,7 @@
       </p:sp>
       <p:sp>
         <p:nvSpPr>
-          <p:cNvPr id="33" name="Text 31"/>
+          <p:cNvPr id="32" name="Text 30"/>
           <p:cNvSpPr/>
           <p:nvPr/>
         </p:nvSpPr>
@@ -20741,7 +20566,7 @@
       </p:sp>
       <p:sp>
         <p:nvSpPr>
-          <p:cNvPr id="34" name="Text 32"/>
+          <p:cNvPr id="33" name="Text 31"/>
           <p:cNvSpPr/>
           <p:nvPr/>
         </p:nvSpPr>
@@ -20780,7 +20605,7 @@
       </p:sp>
       <p:sp>
         <p:nvSpPr>
-          <p:cNvPr id="35" name="Shape 33"/>
+          <p:cNvPr id="34" name="Shape 32"/>
           <p:cNvSpPr/>
           <p:nvPr/>
         </p:nvSpPr>
@@ -20807,7 +20632,7 @@
       </p:sp>
       <p:sp>
         <p:nvSpPr>
-          <p:cNvPr id="36" name="Text 34"/>
+          <p:cNvPr id="35" name="Text 33"/>
           <p:cNvSpPr/>
           <p:nvPr/>
         </p:nvSpPr>
@@ -20846,7 +20671,7 @@
       </p:sp>
       <p:sp>
         <p:nvSpPr>
-          <p:cNvPr id="37" name="Shape 35"/>
+          <p:cNvPr id="36" name="Shape 34"/>
           <p:cNvSpPr/>
           <p:nvPr/>
         </p:nvSpPr>
@@ -20873,7 +20698,7 @@
       </p:sp>
       <p:sp>
         <p:nvSpPr>
-          <p:cNvPr id="38" name="Text 36"/>
+          <p:cNvPr id="37" name="Text 35"/>
           <p:cNvSpPr/>
           <p:nvPr/>
         </p:nvSpPr>
@@ -20912,7 +20737,7 @@
       </p:sp>
       <p:sp>
         <p:nvSpPr>
-          <p:cNvPr id="39" name="Shape 37"/>
+          <p:cNvPr id="38" name="Shape 36"/>
           <p:cNvSpPr/>
           <p:nvPr/>
         </p:nvSpPr>
@@ -20939,7 +20764,7 @@
       </p:sp>
       <p:sp>
         <p:nvSpPr>
-          <p:cNvPr id="40" name="Text 38"/>
+          <p:cNvPr id="39" name="Text 37"/>
           <p:cNvSpPr/>
           <p:nvPr/>
         </p:nvSpPr>
@@ -21691,7 +21516,7 @@
                 <a:ea typeface="Calibri" pitchFamily="34" charset="-122"/>
                 <a:cs typeface="Calibri" pitchFamily="34" charset="-120"/>
               </a:rPr>
-              <a:t>having a tendency toward</a:t>
+              <a:t>relating to</a:t>
             </a:r>
             <a:endParaRPr lang="en-US" sz="850" dirty="0"/>
           </a:p>
@@ -21803,7 +21628,7 @@
                 <a:ea typeface="Calibri" pitchFamily="34" charset="-122"/>
                 <a:cs typeface="Calibri" pitchFamily="34" charset="-120"/>
               </a:rPr>
-              <a:t>full of</a:t>
+              <a:t>full of, having the quality of</a:t>
             </a:r>
             <a:endParaRPr lang="en-US" sz="850" dirty="0"/>
           </a:p>
@@ -21811,14 +21636,806 @@
       </p:sp>
       <p:sp>
         <p:nvSpPr>
-          <p:cNvPr id="25" name="Text 23"/>
-          <p:cNvSpPr/>
-          <p:nvPr/>
-        </p:nvSpPr>
-        <p:spPr>
-          <a:xfrm>
-            <a:off x="6519672" y="2752344"/>
-            <a:ext cx="1828800" cy="182880"/>
+          <p:cNvPr id="25" name="Shape 23"/>
+          <p:cNvSpPr/>
+          <p:nvPr/>
+        </p:nvSpPr>
+        <p:spPr>
+          <a:xfrm>
+            <a:off x="365760" y="3273552"/>
+            <a:ext cx="1371600" cy="658368"/>
+          </a:xfrm>
+          <a:prstGeom prst="rect">
+            <a:avLst>
+              <a:gd name="adj" fmla="val 8333"/>
+            </a:avLst>
+          </a:prstGeom>
+          <a:solidFill>
+            <a:srgbClr val="E2E8F0"/>
+          </a:solidFill>
+          <a:ln w="12700">
+            <a:solidFill>
+              <a:srgbClr val="E2E8F0"/>
+            </a:solidFill>
+            <a:prstDash val="solid"/>
+          </a:ln>
+        </p:spPr>
+      </p:sp>
+      <p:sp>
+        <p:nvSpPr>
+          <p:cNvPr id="26" name="Text 24"/>
+          <p:cNvSpPr/>
+          <p:nvPr/>
+        </p:nvSpPr>
+        <p:spPr>
+          <a:xfrm>
+            <a:off x="365760" y="3273552"/>
+            <a:ext cx="1371600" cy="658368"/>
+          </a:xfrm>
+          <a:prstGeom prst="rect">
+            <a:avLst/>
+          </a:prstGeom>
+          <a:noFill/>
+          <a:ln/>
+        </p:spPr>
+        <p:txBody>
+          <a:bodyPr wrap="square" lIns="0" tIns="0" rIns="0" bIns="0" rtlCol="0" anchor="ctr"/>
+          <a:lstStyle/>
+          <a:p>
+            <a:pPr algn="ctr" indent="0" marL="0">
+              <a:buNone/>
+            </a:pPr>
+            <a:r>
+              <a:rPr lang="en-US" sz="1100" b="1" dirty="0">
+                <a:solidFill>
+                  <a:srgbClr val="475569"/>
+                </a:solidFill>
+                <a:latin typeface="Trebuchet MS" pitchFamily="34" charset="0"/>
+                <a:ea typeface="Trebuchet MS" pitchFamily="34" charset="-122"/>
+                <a:cs typeface="Trebuchet MS" pitchFamily="34" charset="-120"/>
+              </a:rPr>
+              <a:t>Syllables</a:t>
+            </a:r>
+            <a:endParaRPr lang="en-US" sz="1100" dirty="0"/>
+          </a:p>
+        </p:txBody>
+      </p:sp>
+      <p:sp>
+        <p:nvSpPr>
+          <p:cNvPr id="27" name="Shape 25"/>
+          <p:cNvSpPr/>
+          <p:nvPr/>
+        </p:nvSpPr>
+        <p:spPr>
+          <a:xfrm>
+            <a:off x="1874520" y="3273552"/>
+            <a:ext cx="6903720" cy="658368"/>
+          </a:xfrm>
+          <a:prstGeom prst="rect">
+            <a:avLst>
+              <a:gd name="adj" fmla="val 8333"/>
+            </a:avLst>
+          </a:prstGeom>
+          <a:solidFill>
+            <a:srgbClr val="CCFBF1"/>
+          </a:solidFill>
+          <a:ln w="12700">
+            <a:solidFill>
+              <a:srgbClr val="0D9488"/>
+            </a:solidFill>
+            <a:prstDash val="solid"/>
+          </a:ln>
+        </p:spPr>
+      </p:sp>
+      <p:sp>
+        <p:nvSpPr>
+          <p:cNvPr id="28" name="Shape 26"/>
+          <p:cNvSpPr/>
+          <p:nvPr/>
+        </p:nvSpPr>
+        <p:spPr>
+          <a:xfrm>
+            <a:off x="2313432" y="3364992"/>
+            <a:ext cx="1645920" cy="475488"/>
+          </a:xfrm>
+          <a:prstGeom prst="rect">
+            <a:avLst>
+              <a:gd name="adj" fmla="val 9615"/>
+            </a:avLst>
+          </a:prstGeom>
+          <a:solidFill>
+            <a:srgbClr val="FFFFFF"/>
+          </a:solidFill>
+          <a:ln w="12700">
+            <a:solidFill>
+              <a:srgbClr val="0D9488"/>
+            </a:solidFill>
+            <a:prstDash val="solid"/>
+          </a:ln>
+        </p:spPr>
+      </p:sp>
+      <p:sp>
+        <p:nvSpPr>
+          <p:cNvPr id="29" name="Text 27"/>
+          <p:cNvSpPr/>
+          <p:nvPr/>
+        </p:nvSpPr>
+        <p:spPr>
+          <a:xfrm>
+            <a:off x="2313432" y="3364992"/>
+            <a:ext cx="1645920" cy="475488"/>
+          </a:xfrm>
+          <a:prstGeom prst="rect">
+            <a:avLst/>
+          </a:prstGeom>
+          <a:noFill/>
+          <a:ln/>
+        </p:spPr>
+        <p:txBody>
+          <a:bodyPr wrap="square" lIns="0" tIns="0" rIns="0" bIns="0" rtlCol="0" anchor="ctr"/>
+          <a:lstStyle/>
+          <a:p>
+            <a:pPr algn="ctr" indent="0" marL="0">
+              <a:buNone/>
+            </a:pPr>
+            <a:r>
+              <a:rPr lang="en-US" sz="1400" b="1" dirty="0">
+                <a:solidFill>
+                  <a:srgbClr val="0D9488"/>
+                </a:solidFill>
+                <a:latin typeface="Trebuchet MS" pitchFamily="34" charset="0"/>
+                <a:ea typeface="Trebuchet MS" pitchFamily="34" charset="-122"/>
+                <a:cs typeface="Trebuchet MS" pitchFamily="34" charset="-120"/>
+              </a:rPr>
+              <a:t>vi</a:t>
+            </a:r>
+            <a:endParaRPr lang="en-US" sz="1400" dirty="0"/>
+          </a:p>
+        </p:txBody>
+      </p:sp>
+      <p:sp>
+        <p:nvSpPr>
+          <p:cNvPr id="30" name="Text 28"/>
+          <p:cNvSpPr/>
+          <p:nvPr/>
+        </p:nvSpPr>
+        <p:spPr>
+          <a:xfrm>
+            <a:off x="3959352" y="3364992"/>
+            <a:ext cx="411480" cy="475488"/>
+          </a:xfrm>
+          <a:prstGeom prst="rect">
+            <a:avLst/>
+          </a:prstGeom>
+          <a:noFill/>
+          <a:ln/>
+        </p:spPr>
+        <p:txBody>
+          <a:bodyPr wrap="square" lIns="0" tIns="0" rIns="0" bIns="0" rtlCol="0" anchor="ctr"/>
+          <a:lstStyle/>
+          <a:p>
+            <a:pPr algn="ctr" indent="0" marL="0">
+              <a:buNone/>
+            </a:pPr>
+            <a:r>
+              <a:rPr lang="en-US" sz="1600" b="1" dirty="0">
+                <a:solidFill>
+                  <a:srgbClr val="0D9488"/>
+                </a:solidFill>
+                <a:latin typeface="Trebuchet MS" pitchFamily="34" charset="0"/>
+                <a:ea typeface="Trebuchet MS" pitchFamily="34" charset="-122"/>
+                <a:cs typeface="Trebuchet MS" pitchFamily="34" charset="-120"/>
+              </a:rPr>
+              <a:t>·</a:t>
+            </a:r>
+            <a:endParaRPr lang="en-US" sz="1600" dirty="0"/>
+          </a:p>
+        </p:txBody>
+      </p:sp>
+      <p:sp>
+        <p:nvSpPr>
+          <p:cNvPr id="31" name="Shape 29"/>
+          <p:cNvSpPr/>
+          <p:nvPr/>
+        </p:nvSpPr>
+        <p:spPr>
+          <a:xfrm>
+            <a:off x="4370832" y="3364992"/>
+            <a:ext cx="1645920" cy="475488"/>
+          </a:xfrm>
+          <a:prstGeom prst="rect">
+            <a:avLst>
+              <a:gd name="adj" fmla="val 9615"/>
+            </a:avLst>
+          </a:prstGeom>
+          <a:solidFill>
+            <a:srgbClr val="FFFFFF"/>
+          </a:solidFill>
+          <a:ln w="12700">
+            <a:solidFill>
+              <a:srgbClr val="0D9488"/>
+            </a:solidFill>
+            <a:prstDash val="solid"/>
+          </a:ln>
+        </p:spPr>
+      </p:sp>
+      <p:sp>
+        <p:nvSpPr>
+          <p:cNvPr id="32" name="Text 30"/>
+          <p:cNvSpPr/>
+          <p:nvPr/>
+        </p:nvSpPr>
+        <p:spPr>
+          <a:xfrm>
+            <a:off x="4370832" y="3364992"/>
+            <a:ext cx="1645920" cy="475488"/>
+          </a:xfrm>
+          <a:prstGeom prst="rect">
+            <a:avLst/>
+          </a:prstGeom>
+          <a:noFill/>
+          <a:ln/>
+        </p:spPr>
+        <p:txBody>
+          <a:bodyPr wrap="square" lIns="0" tIns="0" rIns="0" bIns="0" rtlCol="0" anchor="ctr"/>
+          <a:lstStyle/>
+          <a:p>
+            <a:pPr algn="ctr" indent="0" marL="0">
+              <a:buNone/>
+            </a:pPr>
+            <a:r>
+              <a:rPr lang="en-US" sz="1400" b="1" dirty="0">
+                <a:solidFill>
+                  <a:srgbClr val="0D9488"/>
+                </a:solidFill>
+                <a:latin typeface="Trebuchet MS" pitchFamily="34" charset="0"/>
+                <a:ea typeface="Trebuchet MS" pitchFamily="34" charset="-122"/>
+                <a:cs typeface="Trebuchet MS" pitchFamily="34" charset="-120"/>
+              </a:rPr>
+              <a:t>va</a:t>
+            </a:r>
+            <a:endParaRPr lang="en-US" sz="1400" dirty="0"/>
+          </a:p>
+        </p:txBody>
+      </p:sp>
+      <p:sp>
+        <p:nvSpPr>
+          <p:cNvPr id="33" name="Text 31"/>
+          <p:cNvSpPr/>
+          <p:nvPr/>
+        </p:nvSpPr>
+        <p:spPr>
+          <a:xfrm>
+            <a:off x="6016752" y="3364992"/>
+            <a:ext cx="411480" cy="475488"/>
+          </a:xfrm>
+          <a:prstGeom prst="rect">
+            <a:avLst/>
+          </a:prstGeom>
+          <a:noFill/>
+          <a:ln/>
+        </p:spPr>
+        <p:txBody>
+          <a:bodyPr wrap="square" lIns="0" tIns="0" rIns="0" bIns="0" rtlCol="0" anchor="ctr"/>
+          <a:lstStyle/>
+          <a:p>
+            <a:pPr algn="ctr" indent="0" marL="0">
+              <a:buNone/>
+            </a:pPr>
+            <a:r>
+              <a:rPr lang="en-US" sz="1600" b="1" dirty="0">
+                <a:solidFill>
+                  <a:srgbClr val="0D9488"/>
+                </a:solidFill>
+                <a:latin typeface="Trebuchet MS" pitchFamily="34" charset="0"/>
+                <a:ea typeface="Trebuchet MS" pitchFamily="34" charset="-122"/>
+                <a:cs typeface="Trebuchet MS" pitchFamily="34" charset="-120"/>
+              </a:rPr>
+              <a:t>·</a:t>
+            </a:r>
+            <a:endParaRPr lang="en-US" sz="1600" dirty="0"/>
+          </a:p>
+        </p:txBody>
+      </p:sp>
+      <p:sp>
+        <p:nvSpPr>
+          <p:cNvPr id="34" name="Shape 32"/>
+          <p:cNvSpPr/>
+          <p:nvPr/>
+        </p:nvSpPr>
+        <p:spPr>
+          <a:xfrm>
+            <a:off x="6428232" y="3364992"/>
+            <a:ext cx="1645920" cy="475488"/>
+          </a:xfrm>
+          <a:prstGeom prst="rect">
+            <a:avLst>
+              <a:gd name="adj" fmla="val 9615"/>
+            </a:avLst>
+          </a:prstGeom>
+          <a:solidFill>
+            <a:srgbClr val="FFFFFF"/>
+          </a:solidFill>
+          <a:ln w="12700">
+            <a:solidFill>
+              <a:srgbClr val="0D9488"/>
+            </a:solidFill>
+            <a:prstDash val="solid"/>
+          </a:ln>
+        </p:spPr>
+      </p:sp>
+      <p:sp>
+        <p:nvSpPr>
+          <p:cNvPr id="35" name="Text 33"/>
+          <p:cNvSpPr/>
+          <p:nvPr/>
+        </p:nvSpPr>
+        <p:spPr>
+          <a:xfrm>
+            <a:off x="6428232" y="3364992"/>
+            <a:ext cx="1645920" cy="475488"/>
+          </a:xfrm>
+          <a:prstGeom prst="rect">
+            <a:avLst/>
+          </a:prstGeom>
+          <a:noFill/>
+          <a:ln/>
+        </p:spPr>
+        <p:txBody>
+          <a:bodyPr wrap="square" lIns="0" tIns="0" rIns="0" bIns="0" rtlCol="0" anchor="ctr"/>
+          <a:lstStyle/>
+          <a:p>
+            <a:pPr algn="ctr" indent="0" marL="0">
+              <a:buNone/>
+            </a:pPr>
+            <a:r>
+              <a:rPr lang="en-US" sz="1400" b="1" dirty="0">
+                <a:solidFill>
+                  <a:srgbClr val="0D9488"/>
+                </a:solidFill>
+                <a:latin typeface="Trebuchet MS" pitchFamily="34" charset="0"/>
+                <a:ea typeface="Trebuchet MS" pitchFamily="34" charset="-122"/>
+                <a:cs typeface="Trebuchet MS" pitchFamily="34" charset="-120"/>
+              </a:rPr>
+              <a:t>cious</a:t>
+            </a:r>
+            <a:endParaRPr lang="en-US" sz="1400" dirty="0"/>
+          </a:p>
+        </p:txBody>
+      </p:sp>
+      <p:sp>
+        <p:nvSpPr>
+          <p:cNvPr id="36" name="Shape 34"/>
+          <p:cNvSpPr/>
+          <p:nvPr/>
+        </p:nvSpPr>
+        <p:spPr>
+          <a:xfrm>
+            <a:off x="365760" y="4096512"/>
+            <a:ext cx="1371600" cy="804672"/>
+          </a:xfrm>
+          <a:prstGeom prst="rect">
+            <a:avLst>
+              <a:gd name="adj" fmla="val 6818"/>
+            </a:avLst>
+          </a:prstGeom>
+          <a:solidFill>
+            <a:srgbClr val="E2E8F0"/>
+          </a:solidFill>
+          <a:ln w="12700">
+            <a:solidFill>
+              <a:srgbClr val="E2E8F0"/>
+            </a:solidFill>
+            <a:prstDash val="solid"/>
+          </a:ln>
+        </p:spPr>
+      </p:sp>
+      <p:sp>
+        <p:nvSpPr>
+          <p:cNvPr id="37" name="Text 35"/>
+          <p:cNvSpPr/>
+          <p:nvPr/>
+        </p:nvSpPr>
+        <p:spPr>
+          <a:xfrm>
+            <a:off x="365760" y="4096512"/>
+            <a:ext cx="1371600" cy="804672"/>
+          </a:xfrm>
+          <a:prstGeom prst="rect">
+            <a:avLst/>
+          </a:prstGeom>
+          <a:noFill/>
+          <a:ln/>
+        </p:spPr>
+        <p:txBody>
+          <a:bodyPr wrap="square" lIns="0" tIns="0" rIns="0" bIns="0" rtlCol="0" anchor="ctr"/>
+          <a:lstStyle/>
+          <a:p>
+            <a:pPr algn="ctr" indent="0" marL="0">
+              <a:buNone/>
+            </a:pPr>
+            <a:r>
+              <a:rPr lang="en-US" sz="1100" b="1" dirty="0">
+                <a:solidFill>
+                  <a:srgbClr val="475569"/>
+                </a:solidFill>
+                <a:latin typeface="Trebuchet MS" pitchFamily="34" charset="0"/>
+                <a:ea typeface="Trebuchet MS" pitchFamily="34" charset="-122"/>
+                <a:cs typeface="Trebuchet MS" pitchFamily="34" charset="-120"/>
+              </a:rPr>
+              <a:t>Phonemes</a:t>
+            </a:r>
+            <a:endParaRPr lang="en-US" sz="1100" dirty="0"/>
+          </a:p>
+        </p:txBody>
+      </p:sp>
+      <p:sp>
+        <p:nvSpPr>
+          <p:cNvPr id="38" name="Shape 36"/>
+          <p:cNvSpPr/>
+          <p:nvPr/>
+        </p:nvSpPr>
+        <p:spPr>
+          <a:xfrm>
+            <a:off x="1874520" y="4096512"/>
+            <a:ext cx="6903720" cy="804672"/>
+          </a:xfrm>
+          <a:prstGeom prst="rect">
+            <a:avLst>
+              <a:gd name="adj" fmla="val 6818"/>
+            </a:avLst>
+          </a:prstGeom>
+          <a:solidFill>
+            <a:srgbClr val="FCE7F3"/>
+          </a:solidFill>
+          <a:ln w="12700">
+            <a:solidFill>
+              <a:srgbClr val="DB2777"/>
+            </a:solidFill>
+            <a:prstDash val="solid"/>
+          </a:ln>
+        </p:spPr>
+      </p:sp>
+      <p:sp>
+        <p:nvSpPr>
+          <p:cNvPr id="39" name="Shape 37"/>
+          <p:cNvSpPr/>
+          <p:nvPr/>
+        </p:nvSpPr>
+        <p:spPr>
+          <a:xfrm>
+            <a:off x="2254649" y="4169664"/>
+            <a:ext cx="685800" cy="384048"/>
+          </a:xfrm>
+          <a:prstGeom prst="rect">
+            <a:avLst>
+              <a:gd name="adj" fmla="val 9524"/>
+            </a:avLst>
+          </a:prstGeom>
+          <a:solidFill>
+            <a:srgbClr val="FFFFFF"/>
+          </a:solidFill>
+          <a:ln w="12700">
+            <a:solidFill>
+              <a:srgbClr val="DB2777"/>
+            </a:solidFill>
+            <a:prstDash val="solid"/>
+          </a:ln>
+        </p:spPr>
+      </p:sp>
+      <p:sp>
+        <p:nvSpPr>
+          <p:cNvPr id="40" name="Text 38"/>
+          <p:cNvSpPr/>
+          <p:nvPr/>
+        </p:nvSpPr>
+        <p:spPr>
+          <a:xfrm>
+            <a:off x="2254649" y="4169664"/>
+            <a:ext cx="685800" cy="384048"/>
+          </a:xfrm>
+          <a:prstGeom prst="rect">
+            <a:avLst/>
+          </a:prstGeom>
+          <a:noFill/>
+          <a:ln/>
+        </p:spPr>
+        <p:txBody>
+          <a:bodyPr wrap="square" lIns="0" tIns="0" rIns="0" bIns="0" rtlCol="0" anchor="ctr"/>
+          <a:lstStyle/>
+          <a:p>
+            <a:pPr algn="ctr" indent="0" marL="0">
+              <a:buNone/>
+            </a:pPr>
+            <a:r>
+              <a:rPr lang="en-US" sz="900" b="1" dirty="0">
+                <a:solidFill>
+                  <a:srgbClr val="9D174D"/>
+                </a:solidFill>
+                <a:latin typeface="Trebuchet MS" pitchFamily="34" charset="0"/>
+                <a:ea typeface="Trebuchet MS" pitchFamily="34" charset="-122"/>
+                <a:cs typeface="Trebuchet MS" pitchFamily="34" charset="-120"/>
+              </a:rPr>
+              <a:t>v</a:t>
+            </a:r>
+            <a:endParaRPr lang="en-US" sz="900" dirty="0"/>
+          </a:p>
+        </p:txBody>
+      </p:sp>
+      <p:sp>
+        <p:nvSpPr>
+          <p:cNvPr id="41" name="Shape 39"/>
+          <p:cNvSpPr/>
+          <p:nvPr/>
+        </p:nvSpPr>
+        <p:spPr>
+          <a:xfrm>
+            <a:off x="3293146" y="4169664"/>
+            <a:ext cx="685800" cy="384048"/>
+          </a:xfrm>
+          <a:prstGeom prst="rect">
+            <a:avLst>
+              <a:gd name="adj" fmla="val 9524"/>
+            </a:avLst>
+          </a:prstGeom>
+          <a:solidFill>
+            <a:srgbClr val="FFFFFF"/>
+          </a:solidFill>
+          <a:ln w="12700">
+            <a:solidFill>
+              <a:srgbClr val="DB2777"/>
+            </a:solidFill>
+            <a:prstDash val="solid"/>
+          </a:ln>
+        </p:spPr>
+      </p:sp>
+      <p:sp>
+        <p:nvSpPr>
+          <p:cNvPr id="42" name="Text 40"/>
+          <p:cNvSpPr/>
+          <p:nvPr/>
+        </p:nvSpPr>
+        <p:spPr>
+          <a:xfrm>
+            <a:off x="3293146" y="4169664"/>
+            <a:ext cx="685800" cy="384048"/>
+          </a:xfrm>
+          <a:prstGeom prst="rect">
+            <a:avLst/>
+          </a:prstGeom>
+          <a:noFill/>
+          <a:ln/>
+        </p:spPr>
+        <p:txBody>
+          <a:bodyPr wrap="square" lIns="0" tIns="0" rIns="0" bIns="0" rtlCol="0" anchor="ctr"/>
+          <a:lstStyle/>
+          <a:p>
+            <a:pPr algn="ctr" indent="0" marL="0">
+              <a:buNone/>
+            </a:pPr>
+            <a:r>
+              <a:rPr lang="en-US" sz="900" b="1" dirty="0">
+                <a:solidFill>
+                  <a:srgbClr val="9D174D"/>
+                </a:solidFill>
+                <a:latin typeface="Trebuchet MS" pitchFamily="34" charset="0"/>
+                <a:ea typeface="Trebuchet MS" pitchFamily="34" charset="-122"/>
+                <a:cs typeface="Trebuchet MS" pitchFamily="34" charset="-120"/>
+              </a:rPr>
+              <a:t>i</a:t>
+            </a:r>
+            <a:endParaRPr lang="en-US" sz="900" dirty="0"/>
+          </a:p>
+        </p:txBody>
+      </p:sp>
+      <p:sp>
+        <p:nvSpPr>
+          <p:cNvPr id="43" name="Shape 41"/>
+          <p:cNvSpPr/>
+          <p:nvPr/>
+        </p:nvSpPr>
+        <p:spPr>
+          <a:xfrm>
+            <a:off x="4331643" y="4169664"/>
+            <a:ext cx="685800" cy="384048"/>
+          </a:xfrm>
+          <a:prstGeom prst="rect">
+            <a:avLst>
+              <a:gd name="adj" fmla="val 9524"/>
+            </a:avLst>
+          </a:prstGeom>
+          <a:solidFill>
+            <a:srgbClr val="FFFFFF"/>
+          </a:solidFill>
+          <a:ln w="12700">
+            <a:solidFill>
+              <a:srgbClr val="DB2777"/>
+            </a:solidFill>
+            <a:prstDash val="solid"/>
+          </a:ln>
+        </p:spPr>
+      </p:sp>
+      <p:sp>
+        <p:nvSpPr>
+          <p:cNvPr id="44" name="Text 42"/>
+          <p:cNvSpPr/>
+          <p:nvPr/>
+        </p:nvSpPr>
+        <p:spPr>
+          <a:xfrm>
+            <a:off x="4331643" y="4169664"/>
+            <a:ext cx="685800" cy="384048"/>
+          </a:xfrm>
+          <a:prstGeom prst="rect">
+            <a:avLst/>
+          </a:prstGeom>
+          <a:noFill/>
+          <a:ln/>
+        </p:spPr>
+        <p:txBody>
+          <a:bodyPr wrap="square" lIns="0" tIns="0" rIns="0" bIns="0" rtlCol="0" anchor="ctr"/>
+          <a:lstStyle/>
+          <a:p>
+            <a:pPr algn="ctr" indent="0" marL="0">
+              <a:buNone/>
+            </a:pPr>
+            <a:r>
+              <a:rPr lang="en-US" sz="900" b="1" dirty="0">
+                <a:solidFill>
+                  <a:srgbClr val="9D174D"/>
+                </a:solidFill>
+                <a:latin typeface="Trebuchet MS" pitchFamily="34" charset="0"/>
+                <a:ea typeface="Trebuchet MS" pitchFamily="34" charset="-122"/>
+                <a:cs typeface="Trebuchet MS" pitchFamily="34" charset="-120"/>
+              </a:rPr>
+              <a:t>v</a:t>
+            </a:r>
+            <a:endParaRPr lang="en-US" sz="900" dirty="0"/>
+          </a:p>
+        </p:txBody>
+      </p:sp>
+      <p:sp>
+        <p:nvSpPr>
+          <p:cNvPr id="45" name="Shape 43"/>
+          <p:cNvSpPr/>
+          <p:nvPr/>
+        </p:nvSpPr>
+        <p:spPr>
+          <a:xfrm>
+            <a:off x="5370141" y="4169664"/>
+            <a:ext cx="685800" cy="384048"/>
+          </a:xfrm>
+          <a:prstGeom prst="rect">
+            <a:avLst>
+              <a:gd name="adj" fmla="val 9524"/>
+            </a:avLst>
+          </a:prstGeom>
+          <a:solidFill>
+            <a:srgbClr val="FFFFFF"/>
+          </a:solidFill>
+          <a:ln w="12700">
+            <a:solidFill>
+              <a:srgbClr val="DB2777"/>
+            </a:solidFill>
+            <a:prstDash val="solid"/>
+          </a:ln>
+        </p:spPr>
+      </p:sp>
+      <p:sp>
+        <p:nvSpPr>
+          <p:cNvPr id="46" name="Text 44"/>
+          <p:cNvSpPr/>
+          <p:nvPr/>
+        </p:nvSpPr>
+        <p:spPr>
+          <a:xfrm>
+            <a:off x="5370141" y="4169664"/>
+            <a:ext cx="685800" cy="384048"/>
+          </a:xfrm>
+          <a:prstGeom prst="rect">
+            <a:avLst/>
+          </a:prstGeom>
+          <a:noFill/>
+          <a:ln/>
+        </p:spPr>
+        <p:txBody>
+          <a:bodyPr wrap="square" lIns="0" tIns="0" rIns="0" bIns="0" rtlCol="0" anchor="ctr"/>
+          <a:lstStyle/>
+          <a:p>
+            <a:pPr algn="ctr" indent="0" marL="0">
+              <a:buNone/>
+            </a:pPr>
+            <a:r>
+              <a:rPr lang="en-US" sz="900" b="1" dirty="0">
+                <a:solidFill>
+                  <a:srgbClr val="9D174D"/>
+                </a:solidFill>
+                <a:latin typeface="Trebuchet MS" pitchFamily="34" charset="0"/>
+                <a:ea typeface="Trebuchet MS" pitchFamily="34" charset="-122"/>
+                <a:cs typeface="Trebuchet MS" pitchFamily="34" charset="-120"/>
+              </a:rPr>
+              <a:t>a</a:t>
+            </a:r>
+            <a:endParaRPr lang="en-US" sz="900" dirty="0"/>
+          </a:p>
+        </p:txBody>
+      </p:sp>
+      <p:sp>
+        <p:nvSpPr>
+          <p:cNvPr id="47" name="Shape 45"/>
+          <p:cNvSpPr/>
+          <p:nvPr/>
+        </p:nvSpPr>
+        <p:spPr>
+          <a:xfrm>
+            <a:off x="6408638" y="4169664"/>
+            <a:ext cx="685800" cy="384048"/>
+          </a:xfrm>
+          <a:prstGeom prst="rect">
+            <a:avLst>
+              <a:gd name="adj" fmla="val 9524"/>
+            </a:avLst>
+          </a:prstGeom>
+          <a:solidFill>
+            <a:srgbClr val="FFFFFF"/>
+          </a:solidFill>
+          <a:ln w="12700">
+            <a:solidFill>
+              <a:srgbClr val="DB2777"/>
+            </a:solidFill>
+            <a:prstDash val="solid"/>
+          </a:ln>
+        </p:spPr>
+      </p:sp>
+      <p:sp>
+        <p:nvSpPr>
+          <p:cNvPr id="48" name="Text 46"/>
+          <p:cNvSpPr/>
+          <p:nvPr/>
+        </p:nvSpPr>
+        <p:spPr>
+          <a:xfrm>
+            <a:off x="6408638" y="4169664"/>
+            <a:ext cx="685800" cy="384048"/>
+          </a:xfrm>
+          <a:prstGeom prst="rect">
+            <a:avLst/>
+          </a:prstGeom>
+          <a:noFill/>
+          <a:ln/>
+        </p:spPr>
+        <p:txBody>
+          <a:bodyPr wrap="square" lIns="0" tIns="0" rIns="0" bIns="0" rtlCol="0" anchor="ctr"/>
+          <a:lstStyle/>
+          <a:p>
+            <a:pPr algn="ctr" indent="0" marL="0">
+              <a:buNone/>
+            </a:pPr>
+            <a:r>
+              <a:rPr lang="en-US" sz="900" b="1" dirty="0">
+                <a:solidFill>
+                  <a:srgbClr val="9D174D"/>
+                </a:solidFill>
+                <a:latin typeface="Trebuchet MS" pitchFamily="34" charset="0"/>
+                <a:ea typeface="Trebuchet MS" pitchFamily="34" charset="-122"/>
+                <a:cs typeface="Trebuchet MS" pitchFamily="34" charset="-120"/>
+              </a:rPr>
+              <a:t>c</a:t>
+            </a:r>
+            <a:endParaRPr lang="en-US" sz="900" dirty="0"/>
+          </a:p>
+        </p:txBody>
+      </p:sp>
+      <p:sp>
+        <p:nvSpPr>
+          <p:cNvPr id="49" name="Text 47"/>
+          <p:cNvSpPr/>
+          <p:nvPr/>
+        </p:nvSpPr>
+        <p:spPr>
+          <a:xfrm>
+            <a:off x="6408638" y="4572000"/>
+            <a:ext cx="685800" cy="219456"/>
           </a:xfrm>
           <a:prstGeom prst="rect">
             <a:avLst/>
@@ -21834,7 +22451,7 @@
               <a:buNone/>
             </a:pPr>
             <a:r>
-              <a:rPr lang="en-US" sz="700" i="1" dirty="0">
+              <a:rPr lang="en-US" sz="750" i="1" dirty="0">
                 <a:solidFill>
                   <a:srgbClr val="94A3B8"/>
                 </a:solidFill>
@@ -21842,49 +22459,49 @@
                 <a:ea typeface="Calibri" pitchFamily="34" charset="-122"/>
                 <a:cs typeface="Calibri" pitchFamily="34" charset="-120"/>
               </a:rPr>
-              <a:t>ti/ci before a vowel often makes /sh/</a:t>
-            </a:r>
-            <a:endParaRPr lang="en-US" sz="700" dirty="0"/>
-          </a:p>
-        </p:txBody>
-      </p:sp>
-      <p:sp>
-        <p:nvSpPr>
-          <p:cNvPr id="26" name="Shape 24"/>
-          <p:cNvSpPr/>
-          <p:nvPr/>
-        </p:nvSpPr>
-        <p:spPr>
-          <a:xfrm>
-            <a:off x="365760" y="3273552"/>
-            <a:ext cx="1371600" cy="658368"/>
+              <a:t>/sh/</a:t>
+            </a:r>
+            <a:endParaRPr lang="en-US" sz="750" dirty="0"/>
+          </a:p>
+        </p:txBody>
+      </p:sp>
+      <p:sp>
+        <p:nvSpPr>
+          <p:cNvPr id="50" name="Shape 48"/>
+          <p:cNvSpPr/>
+          <p:nvPr/>
+        </p:nvSpPr>
+        <p:spPr>
+          <a:xfrm>
+            <a:off x="7447135" y="4169664"/>
+            <a:ext cx="685800" cy="384048"/>
           </a:xfrm>
           <a:prstGeom prst="rect">
             <a:avLst>
-              <a:gd name="adj" fmla="val 8333"/>
+              <a:gd name="adj" fmla="val 9524"/>
             </a:avLst>
           </a:prstGeom>
           <a:solidFill>
-            <a:srgbClr val="E2E8F0"/>
-          </a:solidFill>
-          <a:ln w="12700">
-            <a:solidFill>
-              <a:srgbClr val="E2E8F0"/>
-            </a:solidFill>
-            <a:prstDash val="solid"/>
-          </a:ln>
-        </p:spPr>
-      </p:sp>
-      <p:sp>
-        <p:nvSpPr>
-          <p:cNvPr id="27" name="Text 25"/>
-          <p:cNvSpPr/>
-          <p:nvPr/>
-        </p:nvSpPr>
-        <p:spPr>
-          <a:xfrm>
-            <a:off x="365760" y="3273552"/>
-            <a:ext cx="1371600" cy="658368"/>
+            <a:srgbClr val="FFFFFF"/>
+          </a:solidFill>
+          <a:ln w="12700">
+            <a:solidFill>
+              <a:srgbClr val="DB2777"/>
+            </a:solidFill>
+            <a:prstDash val="solid"/>
+          </a:ln>
+        </p:spPr>
+      </p:sp>
+      <p:sp>
+        <p:nvSpPr>
+          <p:cNvPr id="51" name="Text 49"/>
+          <p:cNvSpPr/>
+          <p:nvPr/>
+        </p:nvSpPr>
+        <p:spPr>
+          <a:xfrm>
+            <a:off x="7447135" y="4169664"/>
+            <a:ext cx="685800" cy="384048"/>
           </a:xfrm>
           <a:prstGeom prst="rect">
             <a:avLst/>
@@ -21900,477 +22517,15 @@
               <a:buNone/>
             </a:pPr>
             <a:r>
-              <a:rPr lang="en-US" sz="1100" b="1" dirty="0">
-                <a:solidFill>
-                  <a:srgbClr val="475569"/>
+              <a:rPr lang="en-US" sz="900" b="1" dirty="0">
+                <a:solidFill>
+                  <a:srgbClr val="9D174D"/>
                 </a:solidFill>
                 <a:latin typeface="Trebuchet MS" pitchFamily="34" charset="0"/>
                 <a:ea typeface="Trebuchet MS" pitchFamily="34" charset="-122"/>
                 <a:cs typeface="Trebuchet MS" pitchFamily="34" charset="-120"/>
               </a:rPr>
-              <a:t>Syllables</a:t>
-            </a:r>
-            <a:endParaRPr lang="en-US" sz="1100" dirty="0"/>
-          </a:p>
-        </p:txBody>
-      </p:sp>
-      <p:sp>
-        <p:nvSpPr>
-          <p:cNvPr id="28" name="Shape 26"/>
-          <p:cNvSpPr/>
-          <p:nvPr/>
-        </p:nvSpPr>
-        <p:spPr>
-          <a:xfrm>
-            <a:off x="1874520" y="3273552"/>
-            <a:ext cx="6903720" cy="658368"/>
-          </a:xfrm>
-          <a:prstGeom prst="rect">
-            <a:avLst>
-              <a:gd name="adj" fmla="val 8333"/>
-            </a:avLst>
-          </a:prstGeom>
-          <a:solidFill>
-            <a:srgbClr val="CCFBF1"/>
-          </a:solidFill>
-          <a:ln w="12700">
-            <a:solidFill>
-              <a:srgbClr val="0D9488"/>
-            </a:solidFill>
-            <a:prstDash val="solid"/>
-          </a:ln>
-        </p:spPr>
-      </p:sp>
-      <p:sp>
-        <p:nvSpPr>
-          <p:cNvPr id="29" name="Shape 27"/>
-          <p:cNvSpPr/>
-          <p:nvPr/>
-        </p:nvSpPr>
-        <p:spPr>
-          <a:xfrm>
-            <a:off x="2313432" y="3364992"/>
-            <a:ext cx="1645920" cy="475488"/>
-          </a:xfrm>
-          <a:prstGeom prst="rect">
-            <a:avLst>
-              <a:gd name="adj" fmla="val 9615"/>
-            </a:avLst>
-          </a:prstGeom>
-          <a:solidFill>
-            <a:srgbClr val="FFFFFF"/>
-          </a:solidFill>
-          <a:ln w="12700">
-            <a:solidFill>
-              <a:srgbClr val="0D9488"/>
-            </a:solidFill>
-            <a:prstDash val="solid"/>
-          </a:ln>
-        </p:spPr>
-      </p:sp>
-      <p:sp>
-        <p:nvSpPr>
-          <p:cNvPr id="30" name="Text 28"/>
-          <p:cNvSpPr/>
-          <p:nvPr/>
-        </p:nvSpPr>
-        <p:spPr>
-          <a:xfrm>
-            <a:off x="2313432" y="3364992"/>
-            <a:ext cx="1645920" cy="475488"/>
-          </a:xfrm>
-          <a:prstGeom prst="rect">
-            <a:avLst/>
-          </a:prstGeom>
-          <a:noFill/>
-          <a:ln/>
-        </p:spPr>
-        <p:txBody>
-          <a:bodyPr wrap="square" lIns="0" tIns="0" rIns="0" bIns="0" rtlCol="0" anchor="ctr"/>
-          <a:lstStyle/>
-          <a:p>
-            <a:pPr algn="ctr" indent="0" marL="0">
-              <a:buNone/>
-            </a:pPr>
-            <a:r>
-              <a:rPr lang="en-US" sz="1400" b="1" dirty="0">
-                <a:solidFill>
-                  <a:srgbClr val="0D9488"/>
-                </a:solidFill>
-                <a:latin typeface="Trebuchet MS" pitchFamily="34" charset="0"/>
-                <a:ea typeface="Trebuchet MS" pitchFamily="34" charset="-122"/>
-                <a:cs typeface="Trebuchet MS" pitchFamily="34" charset="-120"/>
-              </a:rPr>
-              <a:t>vi</a:t>
-            </a:r>
-            <a:endParaRPr lang="en-US" sz="1400" dirty="0"/>
-          </a:p>
-        </p:txBody>
-      </p:sp>
-      <p:sp>
-        <p:nvSpPr>
-          <p:cNvPr id="31" name="Text 29"/>
-          <p:cNvSpPr/>
-          <p:nvPr/>
-        </p:nvSpPr>
-        <p:spPr>
-          <a:xfrm>
-            <a:off x="3959352" y="3364992"/>
-            <a:ext cx="411480" cy="475488"/>
-          </a:xfrm>
-          <a:prstGeom prst="rect">
-            <a:avLst/>
-          </a:prstGeom>
-          <a:noFill/>
-          <a:ln/>
-        </p:spPr>
-        <p:txBody>
-          <a:bodyPr wrap="square" lIns="0" tIns="0" rIns="0" bIns="0" rtlCol="0" anchor="ctr"/>
-          <a:lstStyle/>
-          <a:p>
-            <a:pPr algn="ctr" indent="0" marL="0">
-              <a:buNone/>
-            </a:pPr>
-            <a:r>
-              <a:rPr lang="en-US" sz="1600" b="1" dirty="0">
-                <a:solidFill>
-                  <a:srgbClr val="0D9488"/>
-                </a:solidFill>
-                <a:latin typeface="Trebuchet MS" pitchFamily="34" charset="0"/>
-                <a:ea typeface="Trebuchet MS" pitchFamily="34" charset="-122"/>
-                <a:cs typeface="Trebuchet MS" pitchFamily="34" charset="-120"/>
-              </a:rPr>
-              <a:t>·</a:t>
-            </a:r>
-            <a:endParaRPr lang="en-US" sz="1600" dirty="0"/>
-          </a:p>
-        </p:txBody>
-      </p:sp>
-      <p:sp>
-        <p:nvSpPr>
-          <p:cNvPr id="32" name="Shape 30"/>
-          <p:cNvSpPr/>
-          <p:nvPr/>
-        </p:nvSpPr>
-        <p:spPr>
-          <a:xfrm>
-            <a:off x="4370832" y="3364992"/>
-            <a:ext cx="1645920" cy="475488"/>
-          </a:xfrm>
-          <a:prstGeom prst="rect">
-            <a:avLst>
-              <a:gd name="adj" fmla="val 9615"/>
-            </a:avLst>
-          </a:prstGeom>
-          <a:solidFill>
-            <a:srgbClr val="FFFFFF"/>
-          </a:solidFill>
-          <a:ln w="12700">
-            <a:solidFill>
-              <a:srgbClr val="0D9488"/>
-            </a:solidFill>
-            <a:prstDash val="solid"/>
-          </a:ln>
-        </p:spPr>
-      </p:sp>
-      <p:sp>
-        <p:nvSpPr>
-          <p:cNvPr id="33" name="Text 31"/>
-          <p:cNvSpPr/>
-          <p:nvPr/>
-        </p:nvSpPr>
-        <p:spPr>
-          <a:xfrm>
-            <a:off x="4370832" y="3364992"/>
-            <a:ext cx="1645920" cy="475488"/>
-          </a:xfrm>
-          <a:prstGeom prst="rect">
-            <a:avLst/>
-          </a:prstGeom>
-          <a:noFill/>
-          <a:ln/>
-        </p:spPr>
-        <p:txBody>
-          <a:bodyPr wrap="square" lIns="0" tIns="0" rIns="0" bIns="0" rtlCol="0" anchor="ctr"/>
-          <a:lstStyle/>
-          <a:p>
-            <a:pPr algn="ctr" indent="0" marL="0">
-              <a:buNone/>
-            </a:pPr>
-            <a:r>
-              <a:rPr lang="en-US" sz="1400" b="1" dirty="0">
-                <a:solidFill>
-                  <a:srgbClr val="0D9488"/>
-                </a:solidFill>
-                <a:latin typeface="Trebuchet MS" pitchFamily="34" charset="0"/>
-                <a:ea typeface="Trebuchet MS" pitchFamily="34" charset="-122"/>
-                <a:cs typeface="Trebuchet MS" pitchFamily="34" charset="-120"/>
-              </a:rPr>
-              <a:t>va</a:t>
-            </a:r>
-            <a:endParaRPr lang="en-US" sz="1400" dirty="0"/>
-          </a:p>
-        </p:txBody>
-      </p:sp>
-      <p:sp>
-        <p:nvSpPr>
-          <p:cNvPr id="34" name="Text 32"/>
-          <p:cNvSpPr/>
-          <p:nvPr/>
-        </p:nvSpPr>
-        <p:spPr>
-          <a:xfrm>
-            <a:off x="6016752" y="3364992"/>
-            <a:ext cx="411480" cy="475488"/>
-          </a:xfrm>
-          <a:prstGeom prst="rect">
-            <a:avLst/>
-          </a:prstGeom>
-          <a:noFill/>
-          <a:ln/>
-        </p:spPr>
-        <p:txBody>
-          <a:bodyPr wrap="square" lIns="0" tIns="0" rIns="0" bIns="0" rtlCol="0" anchor="ctr"/>
-          <a:lstStyle/>
-          <a:p>
-            <a:pPr algn="ctr" indent="0" marL="0">
-              <a:buNone/>
-            </a:pPr>
-            <a:r>
-              <a:rPr lang="en-US" sz="1600" b="1" dirty="0">
-                <a:solidFill>
-                  <a:srgbClr val="0D9488"/>
-                </a:solidFill>
-                <a:latin typeface="Trebuchet MS" pitchFamily="34" charset="0"/>
-                <a:ea typeface="Trebuchet MS" pitchFamily="34" charset="-122"/>
-                <a:cs typeface="Trebuchet MS" pitchFamily="34" charset="-120"/>
-              </a:rPr>
-              <a:t>·</a:t>
-            </a:r>
-            <a:endParaRPr lang="en-US" sz="1600" dirty="0"/>
-          </a:p>
-        </p:txBody>
-      </p:sp>
-      <p:sp>
-        <p:nvSpPr>
-          <p:cNvPr id="35" name="Shape 33"/>
-          <p:cNvSpPr/>
-          <p:nvPr/>
-        </p:nvSpPr>
-        <p:spPr>
-          <a:xfrm>
-            <a:off x="6428232" y="3364992"/>
-            <a:ext cx="1645920" cy="475488"/>
-          </a:xfrm>
-          <a:prstGeom prst="rect">
-            <a:avLst>
-              <a:gd name="adj" fmla="val 9615"/>
-            </a:avLst>
-          </a:prstGeom>
-          <a:solidFill>
-            <a:srgbClr val="FFFFFF"/>
-          </a:solidFill>
-          <a:ln w="12700">
-            <a:solidFill>
-              <a:srgbClr val="0D9488"/>
-            </a:solidFill>
-            <a:prstDash val="solid"/>
-          </a:ln>
-        </p:spPr>
-      </p:sp>
-      <p:sp>
-        <p:nvSpPr>
-          <p:cNvPr id="36" name="Text 34"/>
-          <p:cNvSpPr/>
-          <p:nvPr/>
-        </p:nvSpPr>
-        <p:spPr>
-          <a:xfrm>
-            <a:off x="6428232" y="3364992"/>
-            <a:ext cx="1645920" cy="475488"/>
-          </a:xfrm>
-          <a:prstGeom prst="rect">
-            <a:avLst/>
-          </a:prstGeom>
-          <a:noFill/>
-          <a:ln/>
-        </p:spPr>
-        <p:txBody>
-          <a:bodyPr wrap="square" lIns="0" tIns="0" rIns="0" bIns="0" rtlCol="0" anchor="ctr"/>
-          <a:lstStyle/>
-          <a:p>
-            <a:pPr algn="ctr" indent="0" marL="0">
-              <a:buNone/>
-            </a:pPr>
-            <a:r>
-              <a:rPr lang="en-US" sz="1400" b="1" dirty="0">
-                <a:solidFill>
-                  <a:srgbClr val="0D9488"/>
-                </a:solidFill>
-                <a:latin typeface="Trebuchet MS" pitchFamily="34" charset="0"/>
-                <a:ea typeface="Trebuchet MS" pitchFamily="34" charset="-122"/>
-                <a:cs typeface="Trebuchet MS" pitchFamily="34" charset="-120"/>
-              </a:rPr>
-              <a:t>cious</a:t>
-            </a:r>
-            <a:endParaRPr lang="en-US" sz="1400" dirty="0"/>
-          </a:p>
-        </p:txBody>
-      </p:sp>
-      <p:sp>
-        <p:nvSpPr>
-          <p:cNvPr id="37" name="Shape 35"/>
-          <p:cNvSpPr/>
-          <p:nvPr/>
-        </p:nvSpPr>
-        <p:spPr>
-          <a:xfrm>
-            <a:off x="365760" y="4096512"/>
-            <a:ext cx="1371600" cy="804672"/>
-          </a:xfrm>
-          <a:prstGeom prst="rect">
-            <a:avLst>
-              <a:gd name="adj" fmla="val 6818"/>
-            </a:avLst>
-          </a:prstGeom>
-          <a:solidFill>
-            <a:srgbClr val="E2E8F0"/>
-          </a:solidFill>
-          <a:ln w="12700">
-            <a:solidFill>
-              <a:srgbClr val="E2E8F0"/>
-            </a:solidFill>
-            <a:prstDash val="solid"/>
-          </a:ln>
-        </p:spPr>
-      </p:sp>
-      <p:sp>
-        <p:nvSpPr>
-          <p:cNvPr id="38" name="Text 36"/>
-          <p:cNvSpPr/>
-          <p:nvPr/>
-        </p:nvSpPr>
-        <p:spPr>
-          <a:xfrm>
-            <a:off x="365760" y="4096512"/>
-            <a:ext cx="1371600" cy="804672"/>
-          </a:xfrm>
-          <a:prstGeom prst="rect">
-            <a:avLst/>
-          </a:prstGeom>
-          <a:noFill/>
-          <a:ln/>
-        </p:spPr>
-        <p:txBody>
-          <a:bodyPr wrap="square" lIns="0" tIns="0" rIns="0" bIns="0" rtlCol="0" anchor="ctr"/>
-          <a:lstStyle/>
-          <a:p>
-            <a:pPr algn="ctr" indent="0" marL="0">
-              <a:buNone/>
-            </a:pPr>
-            <a:r>
-              <a:rPr lang="en-US" sz="1100" b="1" dirty="0">
-                <a:solidFill>
-                  <a:srgbClr val="475569"/>
-                </a:solidFill>
-                <a:latin typeface="Trebuchet MS" pitchFamily="34" charset="0"/>
-                <a:ea typeface="Trebuchet MS" pitchFamily="34" charset="-122"/>
-                <a:cs typeface="Trebuchet MS" pitchFamily="34" charset="-120"/>
-              </a:rPr>
-              <a:t>Phonemes</a:t>
-            </a:r>
-            <a:endParaRPr lang="en-US" sz="1100" dirty="0"/>
-          </a:p>
-        </p:txBody>
-      </p:sp>
-      <p:sp>
-        <p:nvSpPr>
-          <p:cNvPr id="39" name="Shape 37"/>
-          <p:cNvSpPr/>
-          <p:nvPr/>
-        </p:nvSpPr>
-        <p:spPr>
-          <a:xfrm>
-            <a:off x="1874520" y="4096512"/>
-            <a:ext cx="6903720" cy="804672"/>
-          </a:xfrm>
-          <a:prstGeom prst="rect">
-            <a:avLst>
-              <a:gd name="adj" fmla="val 6818"/>
-            </a:avLst>
-          </a:prstGeom>
-          <a:solidFill>
-            <a:srgbClr val="FCE7F3"/>
-          </a:solidFill>
-          <a:ln w="12700">
-            <a:solidFill>
-              <a:srgbClr val="DB2777"/>
-            </a:solidFill>
-            <a:prstDash val="solid"/>
-          </a:ln>
-        </p:spPr>
-      </p:sp>
-      <p:sp>
-        <p:nvSpPr>
-          <p:cNvPr id="40" name="Shape 38"/>
-          <p:cNvSpPr/>
-          <p:nvPr/>
-        </p:nvSpPr>
-        <p:spPr>
-          <a:xfrm>
-            <a:off x="2023872" y="4169664"/>
-            <a:ext cx="685800" cy="384048"/>
-          </a:xfrm>
-          <a:prstGeom prst="rect">
-            <a:avLst>
-              <a:gd name="adj" fmla="val 9524"/>
-            </a:avLst>
-          </a:prstGeom>
-          <a:solidFill>
-            <a:srgbClr val="FFFFFF"/>
-          </a:solidFill>
-          <a:ln w="12700">
-            <a:solidFill>
-              <a:srgbClr val="DB2777"/>
-            </a:solidFill>
-            <a:prstDash val="solid"/>
-          </a:ln>
-        </p:spPr>
-      </p:sp>
-      <p:sp>
-        <p:nvSpPr>
-          <p:cNvPr id="41" name="Text 39"/>
-          <p:cNvSpPr/>
-          <p:nvPr/>
-        </p:nvSpPr>
-        <p:spPr>
-          <a:xfrm>
-            <a:off x="2023872" y="4169664"/>
-            <a:ext cx="685800" cy="384048"/>
-          </a:xfrm>
-          <a:prstGeom prst="rect">
-            <a:avLst/>
-          </a:prstGeom>
-          <a:noFill/>
-          <a:ln/>
-        </p:spPr>
-        <p:txBody>
-          <a:bodyPr wrap="square" lIns="0" tIns="0" rIns="0" bIns="0" rtlCol="0" anchor="ctr"/>
-          <a:lstStyle/>
-          <a:p>
-            <a:pPr algn="ctr" indent="0" marL="0">
-              <a:buNone/>
-            </a:pPr>
-            <a:r>
-              <a:rPr lang="en-US" sz="900" b="1" dirty="0">
-                <a:solidFill>
-                  <a:srgbClr val="9D174D"/>
-                </a:solidFill>
-                <a:latin typeface="Trebuchet MS" pitchFamily="34" charset="0"/>
-                <a:ea typeface="Trebuchet MS" pitchFamily="34" charset="-122"/>
-                <a:cs typeface="Trebuchet MS" pitchFamily="34" charset="-120"/>
-              </a:rPr>
-              <a:t>v</a:t>
+              <a:t>ious</a:t>
             </a:r>
             <a:endParaRPr lang="en-US" sz="900" dirty="0"/>
           </a:p>
@@ -22378,277 +22533,13 @@
       </p:sp>
       <p:sp>
         <p:nvSpPr>
-          <p:cNvPr id="42" name="Shape 40"/>
-          <p:cNvSpPr/>
-          <p:nvPr/>
-        </p:nvSpPr>
-        <p:spPr>
-          <a:xfrm>
-            <a:off x="2831592" y="4169664"/>
-            <a:ext cx="685800" cy="384048"/>
-          </a:xfrm>
-          <a:prstGeom prst="rect">
-            <a:avLst>
-              <a:gd name="adj" fmla="val 9524"/>
-            </a:avLst>
-          </a:prstGeom>
-          <a:solidFill>
-            <a:srgbClr val="FFFFFF"/>
-          </a:solidFill>
-          <a:ln w="12700">
-            <a:solidFill>
-              <a:srgbClr val="DB2777"/>
-            </a:solidFill>
-            <a:prstDash val="solid"/>
-          </a:ln>
-        </p:spPr>
-      </p:sp>
-      <p:sp>
-        <p:nvSpPr>
-          <p:cNvPr id="43" name="Text 41"/>
-          <p:cNvSpPr/>
-          <p:nvPr/>
-        </p:nvSpPr>
-        <p:spPr>
-          <a:xfrm>
-            <a:off x="2831592" y="4169664"/>
-            <a:ext cx="685800" cy="384048"/>
-          </a:xfrm>
-          <a:prstGeom prst="rect">
-            <a:avLst/>
-          </a:prstGeom>
-          <a:noFill/>
-          <a:ln/>
-        </p:spPr>
-        <p:txBody>
-          <a:bodyPr wrap="square" lIns="0" tIns="0" rIns="0" bIns="0" rtlCol="0" anchor="ctr"/>
-          <a:lstStyle/>
-          <a:p>
-            <a:pPr algn="ctr" indent="0" marL="0">
-              <a:buNone/>
-            </a:pPr>
-            <a:r>
-              <a:rPr lang="en-US" sz="900" b="1" dirty="0">
-                <a:solidFill>
-                  <a:srgbClr val="9D174D"/>
-                </a:solidFill>
-                <a:latin typeface="Trebuchet MS" pitchFamily="34" charset="0"/>
-                <a:ea typeface="Trebuchet MS" pitchFamily="34" charset="-122"/>
-                <a:cs typeface="Trebuchet MS" pitchFamily="34" charset="-120"/>
-              </a:rPr>
-              <a:t>i</a:t>
-            </a:r>
-            <a:endParaRPr lang="en-US" sz="900" dirty="0"/>
-          </a:p>
-        </p:txBody>
-      </p:sp>
-      <p:sp>
-        <p:nvSpPr>
-          <p:cNvPr id="44" name="Shape 42"/>
-          <p:cNvSpPr/>
-          <p:nvPr/>
-        </p:nvSpPr>
-        <p:spPr>
-          <a:xfrm>
-            <a:off x="3639312" y="4169664"/>
-            <a:ext cx="685800" cy="384048"/>
-          </a:xfrm>
-          <a:prstGeom prst="rect">
-            <a:avLst>
-              <a:gd name="adj" fmla="val 9524"/>
-            </a:avLst>
-          </a:prstGeom>
-          <a:solidFill>
-            <a:srgbClr val="FFFFFF"/>
-          </a:solidFill>
-          <a:ln w="12700">
-            <a:solidFill>
-              <a:srgbClr val="DB2777"/>
-            </a:solidFill>
-            <a:prstDash val="solid"/>
-          </a:ln>
-        </p:spPr>
-      </p:sp>
-      <p:sp>
-        <p:nvSpPr>
-          <p:cNvPr id="45" name="Text 43"/>
-          <p:cNvSpPr/>
-          <p:nvPr/>
-        </p:nvSpPr>
-        <p:spPr>
-          <a:xfrm>
-            <a:off x="3639312" y="4169664"/>
-            <a:ext cx="685800" cy="384048"/>
-          </a:xfrm>
-          <a:prstGeom prst="rect">
-            <a:avLst/>
-          </a:prstGeom>
-          <a:noFill/>
-          <a:ln/>
-        </p:spPr>
-        <p:txBody>
-          <a:bodyPr wrap="square" lIns="0" tIns="0" rIns="0" bIns="0" rtlCol="0" anchor="ctr"/>
-          <a:lstStyle/>
-          <a:p>
-            <a:pPr algn="ctr" indent="0" marL="0">
-              <a:buNone/>
-            </a:pPr>
-            <a:r>
-              <a:rPr lang="en-US" sz="900" b="1" dirty="0">
-                <a:solidFill>
-                  <a:srgbClr val="9D174D"/>
-                </a:solidFill>
-                <a:latin typeface="Trebuchet MS" pitchFamily="34" charset="0"/>
-                <a:ea typeface="Trebuchet MS" pitchFamily="34" charset="-122"/>
-                <a:cs typeface="Trebuchet MS" pitchFamily="34" charset="-120"/>
-              </a:rPr>
-              <a:t>v</a:t>
-            </a:r>
-            <a:endParaRPr lang="en-US" sz="900" dirty="0"/>
-          </a:p>
-        </p:txBody>
-      </p:sp>
-      <p:sp>
-        <p:nvSpPr>
-          <p:cNvPr id="46" name="Shape 44"/>
-          <p:cNvSpPr/>
-          <p:nvPr/>
-        </p:nvSpPr>
-        <p:spPr>
-          <a:xfrm>
-            <a:off x="4447032" y="4169664"/>
-            <a:ext cx="685800" cy="384048"/>
-          </a:xfrm>
-          <a:prstGeom prst="rect">
-            <a:avLst>
-              <a:gd name="adj" fmla="val 9524"/>
-            </a:avLst>
-          </a:prstGeom>
-          <a:solidFill>
-            <a:srgbClr val="FFFFFF"/>
-          </a:solidFill>
-          <a:ln w="12700">
-            <a:solidFill>
-              <a:srgbClr val="DB2777"/>
-            </a:solidFill>
-            <a:prstDash val="solid"/>
-          </a:ln>
-        </p:spPr>
-      </p:sp>
-      <p:sp>
-        <p:nvSpPr>
-          <p:cNvPr id="47" name="Text 45"/>
-          <p:cNvSpPr/>
-          <p:nvPr/>
-        </p:nvSpPr>
-        <p:spPr>
-          <a:xfrm>
-            <a:off x="4447032" y="4169664"/>
-            <a:ext cx="685800" cy="384048"/>
-          </a:xfrm>
-          <a:prstGeom prst="rect">
-            <a:avLst/>
-          </a:prstGeom>
-          <a:noFill/>
-          <a:ln/>
-        </p:spPr>
-        <p:txBody>
-          <a:bodyPr wrap="square" lIns="0" tIns="0" rIns="0" bIns="0" rtlCol="0" anchor="ctr"/>
-          <a:lstStyle/>
-          <a:p>
-            <a:pPr algn="ctr" indent="0" marL="0">
-              <a:buNone/>
-            </a:pPr>
-            <a:r>
-              <a:rPr lang="en-US" sz="900" b="1" dirty="0">
-                <a:solidFill>
-                  <a:srgbClr val="9D174D"/>
-                </a:solidFill>
-                <a:latin typeface="Trebuchet MS" pitchFamily="34" charset="0"/>
-                <a:ea typeface="Trebuchet MS" pitchFamily="34" charset="-122"/>
-                <a:cs typeface="Trebuchet MS" pitchFamily="34" charset="-120"/>
-              </a:rPr>
-              <a:t>a</a:t>
-            </a:r>
-            <a:endParaRPr lang="en-US" sz="900" dirty="0"/>
-          </a:p>
-        </p:txBody>
-      </p:sp>
-      <p:sp>
-        <p:nvSpPr>
-          <p:cNvPr id="48" name="Shape 46"/>
-          <p:cNvSpPr/>
-          <p:nvPr/>
-        </p:nvSpPr>
-        <p:spPr>
-          <a:xfrm>
-            <a:off x="5254752" y="4169664"/>
-            <a:ext cx="685800" cy="384048"/>
-          </a:xfrm>
-          <a:prstGeom prst="rect">
-            <a:avLst>
-              <a:gd name="adj" fmla="val 9524"/>
-            </a:avLst>
-          </a:prstGeom>
-          <a:solidFill>
-            <a:srgbClr val="FFFFFF"/>
-          </a:solidFill>
-          <a:ln w="12700">
-            <a:solidFill>
-              <a:srgbClr val="DB2777"/>
-            </a:solidFill>
-            <a:prstDash val="solid"/>
-          </a:ln>
-        </p:spPr>
-      </p:sp>
-      <p:sp>
-        <p:nvSpPr>
-          <p:cNvPr id="49" name="Text 47"/>
-          <p:cNvSpPr/>
-          <p:nvPr/>
-        </p:nvSpPr>
-        <p:spPr>
-          <a:xfrm>
-            <a:off x="5254752" y="4169664"/>
-            <a:ext cx="685800" cy="384048"/>
-          </a:xfrm>
-          <a:prstGeom prst="rect">
-            <a:avLst/>
-          </a:prstGeom>
-          <a:noFill/>
-          <a:ln/>
-        </p:spPr>
-        <p:txBody>
-          <a:bodyPr wrap="square" lIns="0" tIns="0" rIns="0" bIns="0" rtlCol="0" anchor="ctr"/>
-          <a:lstStyle/>
-          <a:p>
-            <a:pPr algn="ctr" indent="0" marL="0">
-              <a:buNone/>
-            </a:pPr>
-            <a:r>
-              <a:rPr lang="en-US" sz="900" b="1" dirty="0">
-                <a:solidFill>
-                  <a:srgbClr val="9D174D"/>
-                </a:solidFill>
-                <a:latin typeface="Trebuchet MS" pitchFamily="34" charset="0"/>
-                <a:ea typeface="Trebuchet MS" pitchFamily="34" charset="-122"/>
-                <a:cs typeface="Trebuchet MS" pitchFamily="34" charset="-120"/>
-              </a:rPr>
-              <a:t>c</a:t>
-            </a:r>
-            <a:endParaRPr lang="en-US" sz="900" dirty="0"/>
-          </a:p>
-        </p:txBody>
-      </p:sp>
-      <p:sp>
-        <p:nvSpPr>
-          <p:cNvPr id="50" name="Text 48"/>
-          <p:cNvSpPr/>
-          <p:nvPr/>
-        </p:nvSpPr>
-        <p:spPr>
-          <a:xfrm>
-            <a:off x="5254752" y="4572000"/>
+          <p:cNvPr id="52" name="Text 50"/>
+          <p:cNvSpPr/>
+          <p:nvPr/>
+        </p:nvSpPr>
+        <p:spPr>
+          <a:xfrm>
+            <a:off x="7447135" y="4572000"/>
             <a:ext cx="685800" cy="219456"/>
           </a:xfrm>
           <a:prstGeom prst="rect">
@@ -22673,207 +22564,9 @@
                 <a:ea typeface="Calibri" pitchFamily="34" charset="-122"/>
                 <a:cs typeface="Calibri" pitchFamily="34" charset="-120"/>
               </a:rPr>
-              <a:t>/sh/</a:t>
+              <a:t>/us/</a:t>
             </a:r>
             <a:endParaRPr lang="en-US" sz="750" dirty="0"/>
-          </a:p>
-        </p:txBody>
-      </p:sp>
-      <p:sp>
-        <p:nvSpPr>
-          <p:cNvPr id="51" name="Shape 49"/>
-          <p:cNvSpPr/>
-          <p:nvPr/>
-        </p:nvSpPr>
-        <p:spPr>
-          <a:xfrm>
-            <a:off x="6062472" y="4169664"/>
-            <a:ext cx="685800" cy="384048"/>
-          </a:xfrm>
-          <a:prstGeom prst="rect">
-            <a:avLst>
-              <a:gd name="adj" fmla="val 9524"/>
-            </a:avLst>
-          </a:prstGeom>
-          <a:solidFill>
-            <a:srgbClr val="FFFFFF"/>
-          </a:solidFill>
-          <a:ln w="12700">
-            <a:solidFill>
-              <a:srgbClr val="DB2777"/>
-            </a:solidFill>
-            <a:prstDash val="solid"/>
-          </a:ln>
-        </p:spPr>
-      </p:sp>
-      <p:sp>
-        <p:nvSpPr>
-          <p:cNvPr id="52" name="Text 50"/>
-          <p:cNvSpPr/>
-          <p:nvPr/>
-        </p:nvSpPr>
-        <p:spPr>
-          <a:xfrm>
-            <a:off x="6062472" y="4169664"/>
-            <a:ext cx="685800" cy="384048"/>
-          </a:xfrm>
-          <a:prstGeom prst="rect">
-            <a:avLst/>
-          </a:prstGeom>
-          <a:noFill/>
-          <a:ln/>
-        </p:spPr>
-        <p:txBody>
-          <a:bodyPr wrap="square" lIns="0" tIns="0" rIns="0" bIns="0" rtlCol="0" anchor="ctr"/>
-          <a:lstStyle/>
-          <a:p>
-            <a:pPr algn="ctr" indent="0" marL="0">
-              <a:buNone/>
-            </a:pPr>
-            <a:r>
-              <a:rPr lang="en-US" sz="900" b="1" dirty="0">
-                <a:solidFill>
-                  <a:srgbClr val="9D174D"/>
-                </a:solidFill>
-                <a:latin typeface="Trebuchet MS" pitchFamily="34" charset="0"/>
-                <a:ea typeface="Trebuchet MS" pitchFamily="34" charset="-122"/>
-                <a:cs typeface="Trebuchet MS" pitchFamily="34" charset="-120"/>
-              </a:rPr>
-              <a:t>i</a:t>
-            </a:r>
-            <a:endParaRPr lang="en-US" sz="900" dirty="0"/>
-          </a:p>
-        </p:txBody>
-      </p:sp>
-      <p:sp>
-        <p:nvSpPr>
-          <p:cNvPr id="53" name="Shape 51"/>
-          <p:cNvSpPr/>
-          <p:nvPr/>
-        </p:nvSpPr>
-        <p:spPr>
-          <a:xfrm>
-            <a:off x="6870192" y="4169664"/>
-            <a:ext cx="685800" cy="384048"/>
-          </a:xfrm>
-          <a:prstGeom prst="rect">
-            <a:avLst>
-              <a:gd name="adj" fmla="val 9524"/>
-            </a:avLst>
-          </a:prstGeom>
-          <a:solidFill>
-            <a:srgbClr val="FFFFFF"/>
-          </a:solidFill>
-          <a:ln w="12700">
-            <a:solidFill>
-              <a:srgbClr val="DB2777"/>
-            </a:solidFill>
-            <a:prstDash val="solid"/>
-          </a:ln>
-        </p:spPr>
-      </p:sp>
-      <p:sp>
-        <p:nvSpPr>
-          <p:cNvPr id="54" name="Text 52"/>
-          <p:cNvSpPr/>
-          <p:nvPr/>
-        </p:nvSpPr>
-        <p:spPr>
-          <a:xfrm>
-            <a:off x="6870192" y="4169664"/>
-            <a:ext cx="685800" cy="384048"/>
-          </a:xfrm>
-          <a:prstGeom prst="rect">
-            <a:avLst/>
-          </a:prstGeom>
-          <a:noFill/>
-          <a:ln/>
-        </p:spPr>
-        <p:txBody>
-          <a:bodyPr wrap="square" lIns="0" tIns="0" rIns="0" bIns="0" rtlCol="0" anchor="ctr"/>
-          <a:lstStyle/>
-          <a:p>
-            <a:pPr algn="ctr" indent="0" marL="0">
-              <a:buNone/>
-            </a:pPr>
-            <a:r>
-              <a:rPr lang="en-US" sz="900" b="1" dirty="0">
-                <a:solidFill>
-                  <a:srgbClr val="9D174D"/>
-                </a:solidFill>
-                <a:latin typeface="Trebuchet MS" pitchFamily="34" charset="0"/>
-                <a:ea typeface="Trebuchet MS" pitchFamily="34" charset="-122"/>
-                <a:cs typeface="Trebuchet MS" pitchFamily="34" charset="-120"/>
-              </a:rPr>
-              <a:t>ou</a:t>
-            </a:r>
-            <a:endParaRPr lang="en-US" sz="900" dirty="0"/>
-          </a:p>
-        </p:txBody>
-      </p:sp>
-      <p:sp>
-        <p:nvSpPr>
-          <p:cNvPr id="55" name="Shape 53"/>
-          <p:cNvSpPr/>
-          <p:nvPr/>
-        </p:nvSpPr>
-        <p:spPr>
-          <a:xfrm>
-            <a:off x="7677912" y="4169664"/>
-            <a:ext cx="685800" cy="384048"/>
-          </a:xfrm>
-          <a:prstGeom prst="rect">
-            <a:avLst>
-              <a:gd name="adj" fmla="val 9524"/>
-            </a:avLst>
-          </a:prstGeom>
-          <a:solidFill>
-            <a:srgbClr val="FFFFFF"/>
-          </a:solidFill>
-          <a:ln w="12700">
-            <a:solidFill>
-              <a:srgbClr val="DB2777"/>
-            </a:solidFill>
-            <a:prstDash val="solid"/>
-          </a:ln>
-        </p:spPr>
-      </p:sp>
-      <p:sp>
-        <p:nvSpPr>
-          <p:cNvPr id="56" name="Text 54"/>
-          <p:cNvSpPr/>
-          <p:nvPr/>
-        </p:nvSpPr>
-        <p:spPr>
-          <a:xfrm>
-            <a:off x="7677912" y="4169664"/>
-            <a:ext cx="685800" cy="384048"/>
-          </a:xfrm>
-          <a:prstGeom prst="rect">
-            <a:avLst/>
-          </a:prstGeom>
-          <a:noFill/>
-          <a:ln/>
-        </p:spPr>
-        <p:txBody>
-          <a:bodyPr wrap="square" lIns="0" tIns="0" rIns="0" bIns="0" rtlCol="0" anchor="ctr"/>
-          <a:lstStyle/>
-          <a:p>
-            <a:pPr algn="ctr" indent="0" marL="0">
-              <a:buNone/>
-            </a:pPr>
-            <a:r>
-              <a:rPr lang="en-US" sz="900" b="1" dirty="0">
-                <a:solidFill>
-                  <a:srgbClr val="9D174D"/>
-                </a:solidFill>
-                <a:latin typeface="Trebuchet MS" pitchFamily="34" charset="0"/>
-                <a:ea typeface="Trebuchet MS" pitchFamily="34" charset="-122"/>
-                <a:cs typeface="Trebuchet MS" pitchFamily="34" charset="-120"/>
-              </a:rPr>
-              <a:t>s</a:t>
-            </a:r>
-            <a:endParaRPr lang="en-US" sz="900" dirty="0"/>
           </a:p>
         </p:txBody>
       </p:sp>
@@ -24307,7 +24000,7 @@
                 <a:ea typeface="Calibri" pitchFamily="34" charset="-122"/>
                 <a:cs typeface="Calibri" pitchFamily="34" charset="-120"/>
               </a:rPr>
-              <a:t>again</a:t>
+              <a:t>again, back</a:t>
             </a:r>
             <a:endParaRPr lang="en-US" sz="850" dirty="0"/>
           </a:p>
@@ -26123,7 +25816,7 @@
                 <a:ea typeface="Calibri" pitchFamily="34" charset="-122"/>
                 <a:cs typeface="Calibri" pitchFamily="34" charset="-120"/>
               </a:rPr>
-              <a:t>again</a:t>
+              <a:t>again, back</a:t>
             </a:r>
             <a:endParaRPr lang="en-US" sz="850" dirty="0"/>
           </a:p>
@@ -27352,7 +27045,7 @@
                 <a:ea typeface="Calibri" pitchFamily="34" charset="-122"/>
                 <a:cs typeface="Calibri" pitchFamily="34" charset="-120"/>
               </a:rPr>
-              <a:t>again</a:t>
+              <a:t>again, back</a:t>
             </a:r>
             <a:endParaRPr lang="en-US" sz="850" dirty="0"/>
           </a:p>
@@ -27947,7 +27640,7 @@
         </p:nvSpPr>
         <p:spPr>
           <a:xfrm>
-            <a:off x="2254649" y="4169664"/>
+            <a:off x="2427732" y="4169664"/>
             <a:ext cx="685800" cy="475488"/>
           </a:xfrm>
           <a:prstGeom prst="rect">
@@ -27974,7 +27667,7 @@
         </p:nvSpPr>
         <p:spPr>
           <a:xfrm>
-            <a:off x="2254649" y="4169664"/>
+            <a:off x="2427732" y="4169664"/>
             <a:ext cx="685800" cy="475488"/>
           </a:xfrm>
           <a:prstGeom prst="rect">
@@ -28013,7 +27706,7 @@
         </p:nvSpPr>
         <p:spPr>
           <a:xfrm>
-            <a:off x="3293146" y="4169664"/>
+            <a:off x="3639312" y="4169664"/>
             <a:ext cx="685800" cy="475488"/>
           </a:xfrm>
           <a:prstGeom prst="rect">
@@ -28040,7 +27733,7 @@
         </p:nvSpPr>
         <p:spPr>
           <a:xfrm>
-            <a:off x="3293146" y="4169664"/>
+            <a:off x="3639312" y="4169664"/>
             <a:ext cx="685800" cy="475488"/>
           </a:xfrm>
           <a:prstGeom prst="rect">
@@ -28079,7 +27772,7 @@
         </p:nvSpPr>
         <p:spPr>
           <a:xfrm>
-            <a:off x="4331643" y="4169664"/>
+            <a:off x="4850892" y="4169664"/>
             <a:ext cx="685800" cy="475488"/>
           </a:xfrm>
           <a:prstGeom prst="rect">
@@ -28106,7 +27799,7 @@
         </p:nvSpPr>
         <p:spPr>
           <a:xfrm>
-            <a:off x="4331643" y="4169664"/>
+            <a:off x="4850892" y="4169664"/>
             <a:ext cx="685800" cy="475488"/>
           </a:xfrm>
           <a:prstGeom prst="rect">
@@ -28145,7 +27838,7 @@
         </p:nvSpPr>
         <p:spPr>
           <a:xfrm>
-            <a:off x="5370141" y="4169664"/>
+            <a:off x="6062472" y="4169664"/>
             <a:ext cx="685800" cy="475488"/>
           </a:xfrm>
           <a:prstGeom prst="rect">
@@ -28172,7 +27865,7 @@
         </p:nvSpPr>
         <p:spPr>
           <a:xfrm>
-            <a:off x="5370141" y="4169664"/>
+            <a:off x="6062472" y="4169664"/>
             <a:ext cx="685800" cy="475488"/>
           </a:xfrm>
           <a:prstGeom prst="rect">
@@ -28211,7 +27904,7 @@
         </p:nvSpPr>
         <p:spPr>
           <a:xfrm>
-            <a:off x="6408638" y="4169664"/>
+            <a:off x="7274052" y="4169664"/>
             <a:ext cx="685800" cy="475488"/>
           </a:xfrm>
           <a:prstGeom prst="rect">
@@ -28238,7 +27931,7 @@
         </p:nvSpPr>
         <p:spPr>
           <a:xfrm>
-            <a:off x="6408638" y="4169664"/>
+            <a:off x="7274052" y="4169664"/>
             <a:ext cx="685800" cy="475488"/>
           </a:xfrm>
           <a:prstGeom prst="rect">
@@ -28263,73 +27956,7 @@
                 <a:ea typeface="Trebuchet MS" pitchFamily="34" charset="-122"/>
                 <a:cs typeface="Trebuchet MS" pitchFamily="34" charset="-120"/>
               </a:rPr>
-              <a:t>v</a:t>
-            </a:r>
-            <a:endParaRPr lang="en-US" sz="900" dirty="0"/>
-          </a:p>
-        </p:txBody>
-      </p:sp>
-      <p:sp>
-        <p:nvSpPr>
-          <p:cNvPr id="46" name="Shape 44"/>
-          <p:cNvSpPr/>
-          <p:nvPr/>
-        </p:nvSpPr>
-        <p:spPr>
-          <a:xfrm>
-            <a:off x="7447135" y="4169664"/>
-            <a:ext cx="685800" cy="475488"/>
-          </a:xfrm>
-          <a:prstGeom prst="rect">
-            <a:avLst>
-              <a:gd name="adj" fmla="val 7692"/>
-            </a:avLst>
-          </a:prstGeom>
-          <a:solidFill>
-            <a:srgbClr val="FFFFFF"/>
-          </a:solidFill>
-          <a:ln w="12700">
-            <a:solidFill>
-              <a:srgbClr val="DB2777"/>
-            </a:solidFill>
-            <a:prstDash val="solid"/>
-          </a:ln>
-        </p:spPr>
-      </p:sp>
-      <p:sp>
-        <p:nvSpPr>
-          <p:cNvPr id="47" name="Text 45"/>
-          <p:cNvSpPr/>
-          <p:nvPr/>
-        </p:nvSpPr>
-        <p:spPr>
-          <a:xfrm>
-            <a:off x="7447135" y="4169664"/>
-            <a:ext cx="685800" cy="475488"/>
-          </a:xfrm>
-          <a:prstGeom prst="rect">
-            <a:avLst/>
-          </a:prstGeom>
-          <a:noFill/>
-          <a:ln/>
-        </p:spPr>
-        <p:txBody>
-          <a:bodyPr wrap="square" lIns="0" tIns="0" rIns="0" bIns="0" rtlCol="0" anchor="ctr"/>
-          <a:lstStyle/>
-          <a:p>
-            <a:pPr algn="ctr" indent="0" marL="0">
-              <a:buNone/>
-            </a:pPr>
-            <a:r>
-              <a:rPr lang="en-US" sz="900" b="1" dirty="0">
-                <a:solidFill>
-                  <a:srgbClr val="9D174D"/>
-                </a:solidFill>
-                <a:latin typeface="Trebuchet MS" pitchFamily="34" charset="0"/>
-                <a:ea typeface="Trebuchet MS" pitchFamily="34" charset="-122"/>
-                <a:cs typeface="Trebuchet MS" pitchFamily="34" charset="-120"/>
-              </a:rPr>
-              <a:t>e</a:t>
+              <a:t>ve</a:t>
             </a:r>
             <a:endParaRPr lang="en-US" sz="900" dirty="0"/>
           </a:p>
@@ -30140,7 +29767,7 @@
                 <a:ea typeface="Calibri" pitchFamily="34" charset="-122"/>
                 <a:cs typeface="Calibri" pitchFamily="34" charset="-120"/>
               </a:rPr>
-              <a:t>relating to, having the quality of</a:t>
+              <a:t>relating to, of the kind of</a:t>
             </a:r>
             <a:endParaRPr lang="en-US" sz="850" dirty="0"/>
           </a:p>
@@ -31388,7 +31015,7 @@
                 <a:ea typeface="Calibri" pitchFamily="34" charset="-122"/>
                 <a:cs typeface="Calibri" pitchFamily="34" charset="-120"/>
               </a:rPr>
-              <a:t>relating to, having the quality of</a:t>
+              <a:t>relating to, of the kind of</a:t>
             </a:r>
             <a:endParaRPr lang="en-US" sz="850" dirty="0"/>
           </a:p>
@@ -32978,7 +32605,7 @@
                 <a:ea typeface="Calibri" pitchFamily="34" charset="-122"/>
                 <a:cs typeface="Calibri" pitchFamily="34" charset="-120"/>
               </a:rPr>
-              <a:t>relating to, having the quality of</a:t>
+              <a:t>relating to, of the kind of</a:t>
             </a:r>
             <a:endParaRPr lang="en-US" sz="850" dirty="0"/>
           </a:p>
@@ -35940,7 +35567,7 @@
                 <a:ea typeface="Trebuchet MS" pitchFamily="34" charset="-122"/>
                 <a:cs typeface="Trebuchet MS" pitchFamily="34" charset="-120"/>
               </a:rPr>
-              <a:t>re-</a:t>
+              <a:t>sur-</a:t>
             </a:r>
             <a:endParaRPr lang="en-US" sz="1300" dirty="0"/>
           </a:p>
@@ -36132,7 +35759,7 @@
                 <a:ea typeface="Trebuchet MS" pitchFamily="34" charset="-122"/>
                 <a:cs typeface="Trebuchet MS" pitchFamily="34" charset="-120"/>
               </a:rPr>
-              <a:t>sur-</a:t>
+              <a:t>re-</a:t>
             </a:r>
             <a:endParaRPr lang="en-US" sz="1300" dirty="0"/>
           </a:p>
@@ -36438,7 +36065,7 @@
                 <a:ea typeface="Trebuchet MS" pitchFamily="34" charset="-122"/>
                 <a:cs typeface="Trebuchet MS" pitchFamily="34" charset="-120"/>
               </a:rPr>
-              <a:t>re-</a:t>
+              <a:t>ob-</a:t>
             </a:r>
             <a:endParaRPr lang="en-US" sz="1300" dirty="0"/>
           </a:p>
@@ -36591,7 +36218,7 @@
                 <a:ea typeface="Trebuchet MS" pitchFamily="34" charset="-122"/>
                 <a:cs typeface="Trebuchet MS" pitchFamily="34" charset="-120"/>
               </a:rPr>
-              <a:t>o-</a:t>
+              <a:t>bel-</a:t>
             </a:r>
             <a:endParaRPr lang="en-US" sz="1300" dirty="0"/>
           </a:p>
@@ -36680,7 +36307,7 @@
                 <a:ea typeface="Trebuchet MS" pitchFamily="34" charset="-122"/>
                 <a:cs typeface="Trebuchet MS" pitchFamily="34" charset="-120"/>
               </a:rPr>
-              <a:t>-al</a:t>
+              <a:t>-acious</a:t>
             </a:r>
             <a:endParaRPr lang="en-US" sz="1300" dirty="0"/>
           </a:p>
@@ -36851,7 +36478,7 @@
                 <a:ea typeface="Trebuchet MS" pitchFamily="34" charset="-122"/>
                 <a:cs typeface="Trebuchet MS" pitchFamily="34" charset="-120"/>
               </a:rPr>
-              <a:t>vivify</a:t>
+              <a:t>survive</a:t>
             </a:r>
             <a:endParaRPr lang="en-US" sz="1200" dirty="0"/>
           </a:p>
@@ -36917,7 +36544,7 @@
                 <a:ea typeface="Trebuchet MS" pitchFamily="34" charset="-122"/>
                 <a:cs typeface="Trebuchet MS" pitchFamily="34" charset="-120"/>
               </a:rPr>
-              <a:t>survive</a:t>
+              <a:t>revive</a:t>
             </a:r>
             <a:endParaRPr lang="en-US" sz="1200" dirty="0"/>
           </a:p>
@@ -36983,7 +36610,7 @@
                 <a:ea typeface="Trebuchet MS" pitchFamily="34" charset="-122"/>
                 <a:cs typeface="Trebuchet MS" pitchFamily="34" charset="-120"/>
               </a:rPr>
-              <a:t>revival</a:t>
+              <a:t>vivacious</a:t>
             </a:r>
             <a:endParaRPr lang="en-US" sz="1200" dirty="0"/>
           </a:p>
@@ -37049,7 +36676,7 @@
                 <a:ea typeface="Trebuchet MS" pitchFamily="34" charset="-122"/>
                 <a:cs typeface="Trebuchet MS" pitchFamily="34" charset="-120"/>
               </a:rPr>
-              <a:t>revive</a:t>
+              <a:t>convivial</a:t>
             </a:r>
             <a:endParaRPr lang="en-US" sz="1200" dirty="0"/>
           </a:p>
@@ -37115,7 +36742,7 @@
                 <a:ea typeface="Trebuchet MS" pitchFamily="34" charset="-122"/>
                 <a:cs typeface="Trebuchet MS" pitchFamily="34" charset="-120"/>
               </a:rPr>
-              <a:t>vivacious</a:t>
+              <a:t>vivarium</a:t>
             </a:r>
             <a:endParaRPr lang="en-US" sz="1200" dirty="0"/>
           </a:p>
@@ -37181,7 +36808,7 @@
                 <a:ea typeface="Trebuchet MS" pitchFamily="34" charset="-122"/>
                 <a:cs typeface="Trebuchet MS" pitchFamily="34" charset="-120"/>
               </a:rPr>
-              <a:t>convivial</a:t>
+              <a:t>survivor</a:t>
             </a:r>
             <a:endParaRPr lang="en-US" sz="1200" dirty="0"/>
           </a:p>
@@ -37247,7 +36874,7 @@
                 <a:ea typeface="Trebuchet MS" pitchFamily="34" charset="-122"/>
                 <a:cs typeface="Trebuchet MS" pitchFamily="34" charset="-120"/>
               </a:rPr>
-              <a:t>vivarium</a:t>
+              <a:t>vivisection</a:t>
             </a:r>
             <a:endParaRPr lang="en-US" sz="1200" dirty="0"/>
           </a:p>
@@ -38435,7 +38062,7 @@
                 <a:ea typeface="Calibri" pitchFamily="34" charset="-122"/>
                 <a:cs typeface="Calibri" pitchFamily="34" charset="-120"/>
               </a:rPr>
-              <a:t>1.  The root 'viv' comes from Latin and means life or living.</a:t>
+              <a:t>1.  The root 'viv' means death or the end of life.</a:t>
             </a:r>
             <a:endParaRPr lang="en-US" sz="1300" dirty="0"/>
           </a:p>
@@ -38458,11 +38085,11 @@
             </a:avLst>
           </a:prstGeom>
           <a:solidFill>
-            <a:srgbClr val="DCFCE7"/>
-          </a:solidFill>
-          <a:ln w="12700">
-            <a:solidFill>
-              <a:srgbClr val="16A34A"/>
+            <a:srgbClr val="FEE2E2"/>
+          </a:solidFill>
+          <a:ln w="12700">
+            <a:solidFill>
+              <a:srgbClr val="DC2626"/>
             </a:solidFill>
             <a:prstDash val="solid"/>
           </a:ln>
@@ -38495,13 +38122,13 @@
             <a:r>
               <a:rPr lang="en-US" sz="1100" b="1" dirty="0">
                 <a:solidFill>
-                  <a:srgbClr val="16A34A"/>
+                  <a:srgbClr val="DC2626"/>
                 </a:solidFill>
                 <a:latin typeface="Trebuchet MS" pitchFamily="34" charset="0"/>
                 <a:ea typeface="Trebuchet MS" pitchFamily="34" charset="-122"/>
                 <a:cs typeface="Trebuchet MS" pitchFamily="34" charset="-120"/>
               </a:rPr>
-              <a:t>TRUE</a:t>
+              <a:t>FALSE</a:t>
             </a:r>
             <a:endParaRPr lang="en-US" sz="1100" dirty="0"/>
           </a:p>
@@ -38574,7 +38201,7 @@
                 <a:ea typeface="Calibri" pitchFamily="34" charset="-122"/>
                 <a:cs typeface="Calibri" pitchFamily="34" charset="-120"/>
               </a:rPr>
-              <a:t>2.  The word 'vivid' means something that is dull and hard to see.</a:t>
+              <a:t>2.  A 'vivarium' is a place where living creatures are kept, which connects to the meaning of 'viv'.</a:t>
             </a:r>
             <a:endParaRPr lang="en-US" sz="1300" dirty="0"/>
           </a:p>
@@ -38597,11 +38224,11 @@
             </a:avLst>
           </a:prstGeom>
           <a:solidFill>
-            <a:srgbClr val="FEE2E2"/>
-          </a:solidFill>
-          <a:ln w="12700">
-            <a:solidFill>
-              <a:srgbClr val="DC2626"/>
+            <a:srgbClr val="DCFCE7"/>
+          </a:solidFill>
+          <a:ln w="12700">
+            <a:solidFill>
+              <a:srgbClr val="16A34A"/>
             </a:solidFill>
             <a:prstDash val="solid"/>
           </a:ln>
@@ -38634,13 +38261,13 @@
             <a:r>
               <a:rPr lang="en-US" sz="1100" b="1" dirty="0">
                 <a:solidFill>
-                  <a:srgbClr val="DC2626"/>
+                  <a:srgbClr val="16A34A"/>
                 </a:solidFill>
                 <a:latin typeface="Trebuchet MS" pitchFamily="34" charset="0"/>
                 <a:ea typeface="Trebuchet MS" pitchFamily="34" charset="-122"/>
                 <a:cs typeface="Trebuchet MS" pitchFamily="34" charset="-120"/>
               </a:rPr>
-              <a:t>FALSE</a:t>
+              <a:t>TRUE</a:t>
             </a:r>
             <a:endParaRPr lang="en-US" sz="1100" dirty="0"/>
           </a:p>
@@ -38713,7 +38340,7 @@
                 <a:ea typeface="Calibri" pitchFamily="34" charset="-122"/>
                 <a:cs typeface="Calibri" pitchFamily="34" charset="-120"/>
               </a:rPr>
-              <a:t>3.  The word 'survive' contains the root 'viv', meaning life.</a:t>
+              <a:t>3.  The word 'survive' contains the root 'viv', meaning that surviving relates to staying alive.</a:t>
             </a:r>
             <a:endParaRPr lang="en-US" sz="1300" dirty="0"/>
           </a:p>
@@ -38852,7 +38479,7 @@
                 <a:ea typeface="Calibri" pitchFamily="34" charset="-122"/>
                 <a:cs typeface="Calibri" pitchFamily="34" charset="-120"/>
               </a:rPr>
-              <a:t>4.  A vivarium is a place where living creatures are kept.</a:t>
+              <a:t>4.  The root 'viv' comes from a Latin word meaning life or to live.</a:t>
             </a:r>
             <a:endParaRPr lang="en-US" sz="1300" dirty="0"/>
           </a:p>
@@ -38991,7 +38618,7 @@
                 <a:ea typeface="Calibri" pitchFamily="34" charset="-122"/>
                 <a:cs typeface="Calibri" pitchFamily="34" charset="-120"/>
               </a:rPr>
-              <a:t>5.  The root 'viv' comes from Greek and means water.</a:t>
+              <a:t>5.  The word 'vivid' has nothing to do with the root 'viv' and means something completely unrelated to life.</a:t>
             </a:r>
             <a:endParaRPr lang="en-US" sz="1300" dirty="0"/>
           </a:p>
@@ -39696,7 +39323,7 @@
                 <a:ea typeface="Trebuchet MS" pitchFamily="34" charset="-122"/>
                 <a:cs typeface="Trebuchet MS" pitchFamily="34" charset="-120"/>
               </a:rPr>
-              <a:t>vivify</a:t>
+              <a:t>survive</a:t>
             </a:r>
             <a:endParaRPr lang="en-US" sz="1300" dirty="0"/>
           </a:p>
@@ -39762,7 +39389,7 @@
                 <a:ea typeface="Trebuchet MS" pitchFamily="34" charset="-122"/>
                 <a:cs typeface="Trebuchet MS" pitchFamily="34" charset="-120"/>
               </a:rPr>
-              <a:t>survive</a:t>
+              <a:t>revive</a:t>
             </a:r>
             <a:endParaRPr lang="en-US" sz="1300" dirty="0"/>
           </a:p>
@@ -39828,7 +39455,7 @@
                 <a:ea typeface="Trebuchet MS" pitchFamily="34" charset="-122"/>
                 <a:cs typeface="Trebuchet MS" pitchFamily="34" charset="-120"/>
               </a:rPr>
-              <a:t>revival</a:t>
+              <a:t>vivacious</a:t>
             </a:r>
             <a:endParaRPr lang="en-US" sz="1300" dirty="0"/>
           </a:p>
@@ -39894,7 +39521,7 @@
                 <a:ea typeface="Trebuchet MS" pitchFamily="34" charset="-122"/>
                 <a:cs typeface="Trebuchet MS" pitchFamily="34" charset="-120"/>
               </a:rPr>
-              <a:t>revive</a:t>
+              <a:t>convivial</a:t>
             </a:r>
             <a:endParaRPr lang="en-US" sz="1300" dirty="0"/>
           </a:p>
@@ -39960,7 +39587,7 @@
                 <a:ea typeface="Trebuchet MS" pitchFamily="34" charset="-122"/>
                 <a:cs typeface="Trebuchet MS" pitchFamily="34" charset="-120"/>
               </a:rPr>
-              <a:t>vivacious</a:t>
+              <a:t>vivarium</a:t>
             </a:r>
             <a:endParaRPr lang="en-US" sz="1300" dirty="0"/>
           </a:p>
@@ -40026,7 +39653,7 @@
                 <a:ea typeface="Trebuchet MS" pitchFamily="34" charset="-122"/>
                 <a:cs typeface="Trebuchet MS" pitchFamily="34" charset="-120"/>
               </a:rPr>
-              <a:t>convivial</a:t>
+              <a:t>survivor</a:t>
             </a:r>
             <a:endParaRPr lang="en-US" sz="1300" dirty="0"/>
           </a:p>
@@ -40619,7 +40246,7 @@
                 <a:ea typeface="Trebuchet MS" pitchFamily="34" charset="-122"/>
                 <a:cs typeface="Trebuchet MS" pitchFamily="34" charset="-120"/>
               </a:rPr>
-              <a:t>re-</a:t>
+              <a:t>sur-</a:t>
             </a:r>
             <a:endParaRPr lang="en-US" sz="1300" dirty="0"/>
           </a:p>
@@ -40811,7 +40438,7 @@
                 <a:ea typeface="Trebuchet MS" pitchFamily="34" charset="-122"/>
                 <a:cs typeface="Trebuchet MS" pitchFamily="34" charset="-120"/>
               </a:rPr>
-              <a:t>sur-</a:t>
+              <a:t>re-</a:t>
             </a:r>
             <a:endParaRPr lang="en-US" sz="1300" dirty="0"/>
           </a:p>
@@ -41117,7 +40744,7 @@
                 <a:ea typeface="Trebuchet MS" pitchFamily="34" charset="-122"/>
                 <a:cs typeface="Trebuchet MS" pitchFamily="34" charset="-120"/>
               </a:rPr>
-              <a:t>re-</a:t>
+              <a:t>ob-</a:t>
             </a:r>
             <a:endParaRPr lang="en-US" sz="1300" dirty="0"/>
           </a:p>
@@ -41270,7 +40897,7 @@
                 <a:ea typeface="Trebuchet MS" pitchFamily="34" charset="-122"/>
                 <a:cs typeface="Trebuchet MS" pitchFamily="34" charset="-120"/>
               </a:rPr>
-              <a:t>o-</a:t>
+              <a:t>bel-</a:t>
             </a:r>
             <a:endParaRPr lang="en-US" sz="1300" dirty="0"/>
           </a:p>
@@ -41359,7 +40986,7 @@
                 <a:ea typeface="Trebuchet MS" pitchFamily="34" charset="-122"/>
                 <a:cs typeface="Trebuchet MS" pitchFamily="34" charset="-120"/>
               </a:rPr>
-              <a:t>-al</a:t>
+              <a:t>-acious</a:t>
             </a:r>
             <a:endParaRPr lang="en-US" sz="1300" dirty="0"/>
           </a:p>
@@ -41413,7 +41040,7 @@
         <p:spPr>
           <a:xfrm>
             <a:off x="1508760" y="4178808"/>
-            <a:ext cx="822960" cy="420624"/>
+            <a:ext cx="950976" cy="420624"/>
           </a:xfrm>
           <a:prstGeom prst="rect">
             <a:avLst>
@@ -41447,7 +41074,7 @@
         <p:spPr>
           <a:xfrm>
             <a:off x="1508760" y="4178808"/>
-            <a:ext cx="822960" cy="420624"/>
+            <a:ext cx="950976" cy="420624"/>
           </a:xfrm>
           <a:prstGeom prst="rect">
             <a:avLst/>
@@ -41471,7 +41098,7 @@
                 <a:ea typeface="Trebuchet MS" pitchFamily="34" charset="-122"/>
                 <a:cs typeface="Trebuchet MS" pitchFamily="34" charset="-120"/>
               </a:rPr>
-              <a:t>re-</a:t>
+              <a:t>sur-</a:t>
             </a:r>
             <a:endParaRPr lang="en-US" sz="1300" dirty="0"/>
           </a:p>
@@ -41485,7 +41112,7 @@
         </p:nvSpPr>
         <p:spPr>
           <a:xfrm>
-            <a:off x="2359152" y="4178808"/>
+            <a:off x="2487168" y="4178808"/>
             <a:ext cx="320040" cy="420624"/>
           </a:xfrm>
           <a:prstGeom prst="rect">
@@ -41524,7 +41151,7 @@
         </p:nvSpPr>
         <p:spPr>
           <a:xfrm>
-            <a:off x="2706624" y="4178808"/>
+            <a:off x="2834640" y="4178808"/>
             <a:ext cx="1097280" cy="420624"/>
           </a:xfrm>
           <a:prstGeom prst="rect">
@@ -41558,7 +41185,7 @@
         </p:nvSpPr>
         <p:spPr>
           <a:xfrm>
-            <a:off x="2706624" y="4178808"/>
+            <a:off x="2834640" y="4178808"/>
             <a:ext cx="1097280" cy="420624"/>
           </a:xfrm>
           <a:prstGeom prst="rect">
@@ -41597,7 +41224,7 @@
         </p:nvSpPr>
         <p:spPr>
           <a:xfrm>
-            <a:off x="3831336" y="4178808"/>
+            <a:off x="3959352" y="4178808"/>
             <a:ext cx="320040" cy="420624"/>
           </a:xfrm>
           <a:prstGeom prst="rect">
@@ -41636,7 +41263,7 @@
         </p:nvSpPr>
         <p:spPr>
           <a:xfrm>
-            <a:off x="4178808" y="4178808"/>
+            <a:off x="4306824" y="4178808"/>
             <a:ext cx="822960" cy="420624"/>
           </a:xfrm>
           <a:prstGeom prst="rect">
@@ -41670,7 +41297,7 @@
         </p:nvSpPr>
         <p:spPr>
           <a:xfrm>
-            <a:off x="4178808" y="4178808"/>
+            <a:off x="4306824" y="4178808"/>
             <a:ext cx="822960" cy="420624"/>
           </a:xfrm>
           <a:prstGeom prst="rect">
@@ -41709,7 +41336,7 @@
         </p:nvSpPr>
         <p:spPr>
           <a:xfrm>
-            <a:off x="5074920" y="4178808"/>
+            <a:off x="5202936" y="4178808"/>
             <a:ext cx="365760" cy="420624"/>
           </a:xfrm>
           <a:prstGeom prst="rect">
@@ -41748,7 +41375,7 @@
         </p:nvSpPr>
         <p:spPr>
           <a:xfrm>
-            <a:off x="5486400" y="4178808"/>
+            <a:off x="5614416" y="4178808"/>
             <a:ext cx="2194560" cy="420624"/>
           </a:xfrm>
           <a:prstGeom prst="rect">
@@ -41775,7 +41402,7 @@
         </p:nvSpPr>
         <p:spPr>
           <a:xfrm>
-            <a:off x="5486400" y="4178808"/>
+            <a:off x="5614416" y="4178808"/>
             <a:ext cx="2194560" cy="420624"/>
           </a:xfrm>
           <a:prstGeom prst="rect">
@@ -42270,7 +41897,7 @@
                 <a:ea typeface="Calibri" pitchFamily="34" charset="-122"/>
                 <a:cs typeface="Calibri" pitchFamily="34" charset="-120"/>
               </a:rPr>
-              <a:t>To stay alive through something difficult or dangerous, like surviving a bushfire or a big storm.</a:t>
+              <a:t>To bring something back to life or make it active again.</a:t>
             </a:r>
             <a:endParaRPr lang="en-US" sz="1200" dirty="0"/>
           </a:p>
@@ -42343,7 +41970,7 @@
                 <a:ea typeface="Trebuchet MS" pitchFamily="34" charset="-122"/>
                 <a:cs typeface="Trebuchet MS" pitchFamily="34" charset="-120"/>
               </a:rPr>
-              <a:t>vivify</a:t>
+              <a:t>survive</a:t>
             </a:r>
             <a:endParaRPr lang="en-US" sz="1200" dirty="0"/>
           </a:p>
@@ -42409,7 +42036,7 @@
                 <a:ea typeface="Calibri" pitchFamily="34" charset="-122"/>
                 <a:cs typeface="Calibri" pitchFamily="34" charset="-120"/>
               </a:rPr>
-              <a:t>To bring someone or something back to life or consciousness — like reviving a wilting plant with water.</a:t>
+              <a:t>Friendly and cheerful in a way that makes everyone feel welcome and happy.</a:t>
             </a:r>
             <a:endParaRPr lang="en-US" sz="1200" dirty="0"/>
           </a:p>
@@ -42482,7 +42109,7 @@
                 <a:ea typeface="Trebuchet MS" pitchFamily="34" charset="-122"/>
                 <a:cs typeface="Trebuchet MS" pitchFamily="34" charset="-120"/>
               </a:rPr>
-              <a:t>survive</a:t>
+              <a:t>revive</a:t>
             </a:r>
             <a:endParaRPr lang="en-US" sz="1200" dirty="0"/>
           </a:p>
@@ -42548,7 +42175,7 @@
                 <a:ea typeface="Calibri" pitchFamily="34" charset="-122"/>
                 <a:cs typeface="Calibri" pitchFamily="34" charset="-120"/>
               </a:rPr>
-              <a:t>Something that is very bright, clear, and full of life — like a vivid rainbow or a vivid dream you remember perfectly.</a:t>
+              <a:t>Very bright and clear, like a colourful painting or a strong memory that feels real.</a:t>
             </a:r>
             <a:endParaRPr lang="en-US" sz="1200" dirty="0"/>
           </a:p>
@@ -42621,7 +42248,7 @@
                 <a:ea typeface="Trebuchet MS" pitchFamily="34" charset="-122"/>
                 <a:cs typeface="Trebuchet MS" pitchFamily="34" charset="-120"/>
               </a:rPr>
-              <a:t>revival</a:t>
+              <a:t>vivacious</a:t>
             </a:r>
             <a:endParaRPr lang="en-US" sz="1200" dirty="0"/>
           </a:p>
@@ -42687,7 +42314,7 @@
                 <a:ea typeface="Calibri" pitchFamily="34" charset="-122"/>
                 <a:cs typeface="Calibri" pitchFamily="34" charset="-120"/>
               </a:rPr>
-              <a:t>Describes a warm, friendly, and lively atmosphere — like the convivial feeling at a family birthday party.</a:t>
+              <a:t>A person who has managed to stay alive after something very dangerous or difficult.</a:t>
             </a:r>
             <a:endParaRPr lang="en-US" sz="1200" dirty="0"/>
           </a:p>
@@ -42760,7 +42387,7 @@
                 <a:ea typeface="Trebuchet MS" pitchFamily="34" charset="-122"/>
                 <a:cs typeface="Trebuchet MS" pitchFamily="34" charset="-120"/>
               </a:rPr>
-              <a:t>revive</a:t>
+              <a:t>convivial</a:t>
             </a:r>
             <a:endParaRPr lang="en-US" sz="1200" dirty="0"/>
           </a:p>
@@ -42826,7 +42453,7 @@
                 <a:ea typeface="Calibri" pitchFamily="34" charset="-122"/>
                 <a:cs typeface="Calibri" pitchFamily="34" charset="-120"/>
               </a:rPr>
-              <a:t>When a person is lively, energetic, and full of fun — you might describe a bubbly friend as vivacious.</a:t>
+              <a:t>A special enclosed space where living animals or plants are kept and cared for.</a:t>
             </a:r>
             <a:endParaRPr lang="en-US" sz="1200" dirty="0"/>
           </a:p>
@@ -42899,7 +42526,7 @@
                 <a:ea typeface="Trebuchet MS" pitchFamily="34" charset="-122"/>
                 <a:cs typeface="Trebuchet MS" pitchFamily="34" charset="-120"/>
               </a:rPr>
-              <a:t>vivacious</a:t>
+              <a:t>vivarium</a:t>
             </a:r>
             <a:endParaRPr lang="en-US" sz="1200" dirty="0"/>
           </a:p>
@@ -42965,7 +42592,7 @@
                 <a:ea typeface="Calibri" pitchFamily="34" charset="-122"/>
                 <a:cs typeface="Calibri" pitchFamily="34" charset="-120"/>
               </a:rPr>
-              <a:t>When something that was dying or forgotten comes back to life — like a revival of an old favourite song.</a:t>
+              <a:t>Full of energy and excitement; very lively and fun to be around.</a:t>
             </a:r>
             <a:endParaRPr lang="en-US" sz="1200" dirty="0"/>
           </a:p>
@@ -43038,7 +42665,7 @@
                 <a:ea typeface="Trebuchet MS" pitchFamily="34" charset="-122"/>
                 <a:cs typeface="Trebuchet MS" pitchFamily="34" charset="-120"/>
               </a:rPr>
-              <a:t>convivial</a:t>
+              <a:t>survivor</a:t>
             </a:r>
             <a:endParaRPr lang="en-US" sz="1200" dirty="0"/>
           </a:p>
@@ -43104,7 +42731,7 @@
                 <a:ea typeface="Calibri" pitchFamily="34" charset="-122"/>
                 <a:cs typeface="Calibri" pitchFamily="34" charset="-120"/>
               </a:rPr>
-              <a:t>To make something feel alive and full of energy — like how music can vivify a dull room.</a:t>
+              <a:t>To stay alive through something dangerous or difficult.</a:t>
             </a:r>
             <a:endParaRPr lang="en-US" sz="1200" dirty="0"/>
           </a:p>
@@ -43599,7 +43226,7 @@
                 <a:ea typeface="Calibri" pitchFamily="34" charset="-122"/>
                 <a:cs typeface="Calibri" pitchFamily="34" charset="-120"/>
               </a:rPr>
-              <a:t>The artist used vivid colours of red, orange, and yellow to paint the sunset over the ocean.</a:t>
+              <a:t>The documentary showed vivid images of life deep beneath the ocean, with glowing creatures we had never seen before.</a:t>
             </a:r>
             <a:endParaRPr lang="en-US" sz="1500" dirty="0"/>
           </a:p>
@@ -43763,7 +43390,7 @@
                 <a:ea typeface="Calibri" pitchFamily="34" charset="-122"/>
                 <a:cs typeface="Calibri" pitchFamily="34" charset="-120"/>
               </a:rPr>
-              <a:t>The paramedics worked quickly to revive the swimmer who had been pulled from the rough surf.</a:t>
+              <a:t>After the long drought, the rain helped revive the dry garden and soon flowers began to bloom again.</a:t>
             </a:r>
             <a:endParaRPr lang="en-US" sz="1500" dirty="0"/>
           </a:p>
@@ -43927,7 +43554,7 @@
                 <a:ea typeface="Calibri" pitchFamily="34" charset="-122"/>
                 <a:cs typeface="Calibri" pitchFamily="34" charset="-120"/>
               </a:rPr>
-              <a:t>Our class visited a vivarium at the zoo where we could see geckos, frogs, and stick insects up close.</a:t>
+              <a:t>The vivacious puppy raced around the park, leaping over everything in its path and making everyone smile.</a:t>
             </a:r>
             <a:endParaRPr lang="en-US" sz="1500" dirty="0"/>
           </a:p>
